--- a/docs/plots/grant/jx_grant_linsubhr_diff_anemia3.pptx
+++ b/docs/plots/grant/jx_grant_linsubhr_diff_anemia3.pptx
@@ -2271,7 +2271,7 @@
           </p:nvSpPr>
           <p:spPr>
             <a:xfrm>
-              <a:off x="915645" y="5038294"/>
+              <a:off x="915645" y="5067975"/>
               <a:ext cx="7682587" cy="0"/>
             </a:xfrm>
             <a:custGeom>
@@ -2314,7 +2314,7 @@
           </p:nvSpPr>
           <p:spPr>
             <a:xfrm>
-              <a:off x="915645" y="4273666"/>
+              <a:off x="915645" y="4288924"/>
               <a:ext cx="7682587" cy="0"/>
             </a:xfrm>
             <a:custGeom>
@@ -2357,7 +2357,7 @@
           </p:nvSpPr>
           <p:spPr>
             <a:xfrm>
-              <a:off x="915645" y="3509037"/>
+              <a:off x="915645" y="3509873"/>
               <a:ext cx="7682587" cy="0"/>
             </a:xfrm>
             <a:custGeom>
@@ -2400,7 +2400,7 @@
           </p:nvSpPr>
           <p:spPr>
             <a:xfrm>
-              <a:off x="915645" y="2744409"/>
+              <a:off x="915645" y="2730822"/>
               <a:ext cx="7682587" cy="0"/>
             </a:xfrm>
             <a:custGeom>
@@ -2443,15 +2443,15 @@
           </p:nvSpPr>
           <p:spPr>
             <a:xfrm>
-              <a:off x="1701364" y="2209169"/>
-              <a:ext cx="0" cy="3364365"/>
+              <a:off x="1264853" y="2185486"/>
+              <a:ext cx="0" cy="3427824"/>
             </a:xfrm>
             <a:custGeom>
               <a:avLst/>
               <a:pathLst>
-                <a:path w="0" h="3364365">
+                <a:path w="0" h="3427824">
                   <a:moveTo>
-                    <a:pt x="0" y="3364365"/>
+                    <a:pt x="0" y="3427824"/>
                   </a:moveTo>
                   <a:lnTo>
                     <a:pt x="0" y="0"/>
@@ -2486,15 +2486,15 @@
           </p:nvSpPr>
           <p:spPr>
             <a:xfrm>
-              <a:off x="3447406" y="2209169"/>
-              <a:ext cx="0" cy="3364365"/>
+              <a:off x="2137874" y="2185486"/>
+              <a:ext cx="0" cy="3427824"/>
             </a:xfrm>
             <a:custGeom>
               <a:avLst/>
               <a:pathLst>
-                <a:path w="0" h="3364365">
+                <a:path w="0" h="3427824">
                   <a:moveTo>
-                    <a:pt x="0" y="3364365"/>
+                    <a:pt x="0" y="3427824"/>
                   </a:moveTo>
                   <a:lnTo>
                     <a:pt x="0" y="0"/>
@@ -2529,15 +2529,15 @@
           </p:nvSpPr>
           <p:spPr>
             <a:xfrm>
-              <a:off x="5193449" y="2209169"/>
-              <a:ext cx="0" cy="3364365"/>
+              <a:off x="3010896" y="2185486"/>
+              <a:ext cx="0" cy="3427824"/>
             </a:xfrm>
             <a:custGeom>
               <a:avLst/>
               <a:pathLst>
-                <a:path w="0" h="3364365">
+                <a:path w="0" h="3427824">
                   <a:moveTo>
-                    <a:pt x="0" y="3364365"/>
+                    <a:pt x="0" y="3427824"/>
                   </a:moveTo>
                   <a:lnTo>
                     <a:pt x="0" y="0"/>
@@ -2572,15 +2572,15 @@
           </p:nvSpPr>
           <p:spPr>
             <a:xfrm>
-              <a:off x="6939491" y="2209169"/>
-              <a:ext cx="0" cy="3364365"/>
+              <a:off x="3883917" y="2185486"/>
+              <a:ext cx="0" cy="3427824"/>
             </a:xfrm>
             <a:custGeom>
               <a:avLst/>
               <a:pathLst>
-                <a:path w="0" h="3364365">
+                <a:path w="0" h="3427824">
                   <a:moveTo>
-                    <a:pt x="0" y="3364365"/>
+                    <a:pt x="0" y="3427824"/>
                   </a:moveTo>
                   <a:lnTo>
                     <a:pt x="0" y="0"/>
@@ -2615,26 +2615,26 @@
           </p:nvSpPr>
           <p:spPr>
             <a:xfrm>
-              <a:off x="915645" y="5420609"/>
-              <a:ext cx="7682587" cy="0"/>
+              <a:off x="4756938" y="2185486"/>
+              <a:ext cx="0" cy="3427824"/>
             </a:xfrm>
             <a:custGeom>
               <a:avLst/>
               <a:pathLst>
-                <a:path w="7682587" h="0">
+                <a:path w="0" h="3427824">
                   <a:moveTo>
+                    <a:pt x="0" y="3427824"/>
+                  </a:moveTo>
+                  <a:lnTo>
                     <a:pt x="0" y="0"/>
-                  </a:moveTo>
-                  <a:lnTo>
-                    <a:pt x="7682587" y="0"/>
-                  </a:lnTo>
-                  <a:lnTo>
-                    <a:pt x="7682587" y="0"/>
+                  </a:lnTo>
+                  <a:lnTo>
+                    <a:pt x="0" y="0"/>
                   </a:lnTo>
                 </a:path>
               </a:pathLst>
             </a:custGeom>
-            <a:ln w="17246" cap="flat">
+            <a:ln w="8623" cap="flat">
               <a:solidFill>
                 <a:srgbClr val="EBEBEB">
                   <a:alpha val="100000"/>
@@ -2658,26 +2658,26 @@
           </p:nvSpPr>
           <p:spPr>
             <a:xfrm>
-              <a:off x="915645" y="4655980"/>
-              <a:ext cx="7682587" cy="0"/>
+              <a:off x="5629959" y="2185486"/>
+              <a:ext cx="0" cy="3427824"/>
             </a:xfrm>
             <a:custGeom>
               <a:avLst/>
               <a:pathLst>
-                <a:path w="7682587" h="0">
+                <a:path w="0" h="3427824">
                   <a:moveTo>
+                    <a:pt x="0" y="3427824"/>
+                  </a:moveTo>
+                  <a:lnTo>
                     <a:pt x="0" y="0"/>
-                  </a:moveTo>
-                  <a:lnTo>
-                    <a:pt x="7682587" y="0"/>
-                  </a:lnTo>
-                  <a:lnTo>
-                    <a:pt x="7682587" y="0"/>
+                  </a:lnTo>
+                  <a:lnTo>
+                    <a:pt x="0" y="0"/>
                   </a:lnTo>
                 </a:path>
               </a:pathLst>
             </a:custGeom>
-            <a:ln w="17246" cap="flat">
+            <a:ln w="8623" cap="flat">
               <a:solidFill>
                 <a:srgbClr val="EBEBEB">
                   <a:alpha val="100000"/>
@@ -2701,26 +2701,26 @@
           </p:nvSpPr>
           <p:spPr>
             <a:xfrm>
-              <a:off x="915645" y="3891352"/>
-              <a:ext cx="7682587" cy="0"/>
+              <a:off x="6502981" y="2185486"/>
+              <a:ext cx="0" cy="3427824"/>
             </a:xfrm>
             <a:custGeom>
               <a:avLst/>
               <a:pathLst>
-                <a:path w="7682587" h="0">
+                <a:path w="0" h="3427824">
                   <a:moveTo>
+                    <a:pt x="0" y="3427824"/>
+                  </a:moveTo>
+                  <a:lnTo>
                     <a:pt x="0" y="0"/>
-                  </a:moveTo>
-                  <a:lnTo>
-                    <a:pt x="7682587" y="0"/>
-                  </a:lnTo>
-                  <a:lnTo>
-                    <a:pt x="7682587" y="0"/>
+                  </a:lnTo>
+                  <a:lnTo>
+                    <a:pt x="0" y="0"/>
                   </a:lnTo>
                 </a:path>
               </a:pathLst>
             </a:custGeom>
-            <a:ln w="17246" cap="flat">
+            <a:ln w="8623" cap="flat">
               <a:solidFill>
                 <a:srgbClr val="EBEBEB">
                   <a:alpha val="100000"/>
@@ -2744,26 +2744,26 @@
           </p:nvSpPr>
           <p:spPr>
             <a:xfrm>
-              <a:off x="915645" y="3126723"/>
-              <a:ext cx="7682587" cy="0"/>
+              <a:off x="7376002" y="2185486"/>
+              <a:ext cx="0" cy="3427824"/>
             </a:xfrm>
             <a:custGeom>
               <a:avLst/>
               <a:pathLst>
-                <a:path w="7682587" h="0">
+                <a:path w="0" h="3427824">
                   <a:moveTo>
+                    <a:pt x="0" y="3427824"/>
+                  </a:moveTo>
+                  <a:lnTo>
                     <a:pt x="0" y="0"/>
-                  </a:moveTo>
-                  <a:lnTo>
-                    <a:pt x="7682587" y="0"/>
-                  </a:lnTo>
-                  <a:lnTo>
-                    <a:pt x="7682587" y="0"/>
+                  </a:lnTo>
+                  <a:lnTo>
+                    <a:pt x="0" y="0"/>
                   </a:lnTo>
                 </a:path>
               </a:pathLst>
             </a:custGeom>
-            <a:ln w="17246" cap="flat">
+            <a:ln w="8623" cap="flat">
               <a:solidFill>
                 <a:srgbClr val="EBEBEB">
                   <a:alpha val="100000"/>
@@ -2787,26 +2787,26 @@
           </p:nvSpPr>
           <p:spPr>
             <a:xfrm>
-              <a:off x="915645" y="2362095"/>
-              <a:ext cx="7682587" cy="0"/>
+              <a:off x="8249023" y="2185486"/>
+              <a:ext cx="0" cy="3427824"/>
             </a:xfrm>
             <a:custGeom>
               <a:avLst/>
               <a:pathLst>
-                <a:path w="7682587" h="0">
+                <a:path w="0" h="3427824">
                   <a:moveTo>
+                    <a:pt x="0" y="3427824"/>
+                  </a:moveTo>
+                  <a:lnTo>
                     <a:pt x="0" y="0"/>
-                  </a:moveTo>
-                  <a:lnTo>
-                    <a:pt x="7682587" y="0"/>
-                  </a:lnTo>
-                  <a:lnTo>
-                    <a:pt x="7682587" y="0"/>
+                  </a:lnTo>
+                  <a:lnTo>
+                    <a:pt x="0" y="0"/>
                   </a:lnTo>
                 </a:path>
               </a:pathLst>
             </a:custGeom>
-            <a:ln w="17246" cap="flat">
+            <a:ln w="8623" cap="flat">
               <a:solidFill>
                 <a:srgbClr val="EBEBEB">
                   <a:alpha val="100000"/>
@@ -2830,21 +2830,21 @@
           </p:nvSpPr>
           <p:spPr>
             <a:xfrm>
-              <a:off x="2574385" y="2209169"/>
-              <a:ext cx="0" cy="3364365"/>
+              <a:off x="915645" y="5457500"/>
+              <a:ext cx="7682587" cy="0"/>
             </a:xfrm>
             <a:custGeom>
               <a:avLst/>
               <a:pathLst>
-                <a:path w="0" h="3364365">
+                <a:path w="7682587" h="0">
                   <a:moveTo>
-                    <a:pt x="0" y="3364365"/>
+                    <a:pt x="0" y="0"/>
                   </a:moveTo>
                   <a:lnTo>
-                    <a:pt x="0" y="0"/>
-                  </a:lnTo>
-                  <a:lnTo>
-                    <a:pt x="0" y="0"/>
+                    <a:pt x="7682587" y="0"/>
+                  </a:lnTo>
+                  <a:lnTo>
+                    <a:pt x="7682587" y="0"/>
                   </a:lnTo>
                 </a:path>
               </a:pathLst>
@@ -2873,21 +2873,21 @@
           </p:nvSpPr>
           <p:spPr>
             <a:xfrm>
-              <a:off x="4320427" y="2209169"/>
-              <a:ext cx="0" cy="3364365"/>
+              <a:off x="915645" y="4678449"/>
+              <a:ext cx="7682587" cy="0"/>
             </a:xfrm>
             <a:custGeom>
               <a:avLst/>
               <a:pathLst>
-                <a:path w="0" h="3364365">
+                <a:path w="7682587" h="0">
                   <a:moveTo>
-                    <a:pt x="0" y="3364365"/>
+                    <a:pt x="0" y="0"/>
                   </a:moveTo>
                   <a:lnTo>
-                    <a:pt x="0" y="0"/>
-                  </a:lnTo>
-                  <a:lnTo>
-                    <a:pt x="0" y="0"/>
+                    <a:pt x="7682587" y="0"/>
+                  </a:lnTo>
+                  <a:lnTo>
+                    <a:pt x="7682587" y="0"/>
                   </a:lnTo>
                 </a:path>
               </a:pathLst>
@@ -2916,21 +2916,21 @@
           </p:nvSpPr>
           <p:spPr>
             <a:xfrm>
-              <a:off x="6066470" y="2209169"/>
-              <a:ext cx="0" cy="3364365"/>
+              <a:off x="915645" y="3899398"/>
+              <a:ext cx="7682587" cy="0"/>
             </a:xfrm>
             <a:custGeom>
               <a:avLst/>
               <a:pathLst>
-                <a:path w="0" h="3364365">
+                <a:path w="7682587" h="0">
                   <a:moveTo>
-                    <a:pt x="0" y="3364365"/>
+                    <a:pt x="0" y="0"/>
                   </a:moveTo>
                   <a:lnTo>
-                    <a:pt x="0" y="0"/>
-                  </a:lnTo>
-                  <a:lnTo>
-                    <a:pt x="0" y="0"/>
+                    <a:pt x="7682587" y="0"/>
+                  </a:lnTo>
+                  <a:lnTo>
+                    <a:pt x="7682587" y="0"/>
                   </a:lnTo>
                 </a:path>
               </a:pathLst>
@@ -2959,21 +2959,21 @@
           </p:nvSpPr>
           <p:spPr>
             <a:xfrm>
-              <a:off x="7812512" y="2209169"/>
-              <a:ext cx="0" cy="3364365"/>
+              <a:off x="915645" y="3120347"/>
+              <a:ext cx="7682587" cy="0"/>
             </a:xfrm>
             <a:custGeom>
               <a:avLst/>
               <a:pathLst>
-                <a:path w="0" h="3364365">
+                <a:path w="7682587" h="0">
                   <a:moveTo>
-                    <a:pt x="0" y="3364365"/>
+                    <a:pt x="0" y="0"/>
                   </a:moveTo>
                   <a:lnTo>
-                    <a:pt x="0" y="0"/>
-                  </a:lnTo>
-                  <a:lnTo>
-                    <a:pt x="0" y="0"/>
+                    <a:pt x="7682587" y="0"/>
+                  </a:lnTo>
+                  <a:lnTo>
+                    <a:pt x="7682587" y="0"/>
                   </a:lnTo>
                 </a:path>
               </a:pathLst>
@@ -2996,534 +2996,921 @@
         </p:sp>
         <p:sp>
           <p:nvSpPr>
-            <p:cNvPr id="21" name="pg21"/>
+            <p:cNvPr id="21" name="pl21"/>
             <p:cNvSpPr/>
             <p:nvPr/>
           </p:nvSpPr>
           <p:spPr>
             <a:xfrm>
-              <a:off x="915645" y="2209169"/>
-              <a:ext cx="7260303" cy="3179625"/>
+              <a:off x="915645" y="2341296"/>
+              <a:ext cx="7682587" cy="0"/>
             </a:xfrm>
             <a:custGeom>
               <a:avLst/>
               <a:pathLst>
-                <a:path w="7260303" h="3179625">
+                <a:path w="7682587" h="0">
                   <a:moveTo>
-                    <a:pt x="1564336" y="0"/>
+                    <a:pt x="0" y="0"/>
                   </a:moveTo>
                   <a:lnTo>
-                    <a:pt x="1601639" y="97085"/>
-                  </a:lnTo>
-                  <a:lnTo>
-                    <a:pt x="1678107" y="284147"/>
-                  </a:lnTo>
-                  <a:lnTo>
-                    <a:pt x="1754576" y="459975"/>
-                  </a:lnTo>
-                  <a:lnTo>
-                    <a:pt x="1831044" y="625241"/>
-                  </a:lnTo>
-                  <a:lnTo>
-                    <a:pt x="1907513" y="780580"/>
-                  </a:lnTo>
-                  <a:lnTo>
-                    <a:pt x="1983981" y="926589"/>
-                  </a:lnTo>
-                  <a:lnTo>
-                    <a:pt x="2060450" y="1063828"/>
-                  </a:lnTo>
-                  <a:lnTo>
-                    <a:pt x="2136918" y="1192824"/>
-                  </a:lnTo>
-                  <a:lnTo>
-                    <a:pt x="2213386" y="1314071"/>
-                  </a:lnTo>
-                  <a:lnTo>
-                    <a:pt x="2289855" y="1428036"/>
-                  </a:lnTo>
-                  <a:lnTo>
-                    <a:pt x="2366323" y="1535156"/>
-                  </a:lnTo>
-                  <a:lnTo>
-                    <a:pt x="2442792" y="1635841"/>
-                  </a:lnTo>
-                  <a:lnTo>
-                    <a:pt x="2519260" y="1730479"/>
-                  </a:lnTo>
-                  <a:lnTo>
-                    <a:pt x="2595729" y="1819433"/>
-                  </a:lnTo>
-                  <a:lnTo>
-                    <a:pt x="2672197" y="1903043"/>
-                  </a:lnTo>
-                  <a:lnTo>
-                    <a:pt x="2748666" y="1981632"/>
-                  </a:lnTo>
-                  <a:lnTo>
-                    <a:pt x="2825134" y="2055500"/>
-                  </a:lnTo>
-                  <a:lnTo>
-                    <a:pt x="2901602" y="2124931"/>
-                  </a:lnTo>
-                  <a:lnTo>
-                    <a:pt x="2978071" y="2190192"/>
-                  </a:lnTo>
-                  <a:lnTo>
-                    <a:pt x="3054539" y="2251533"/>
-                  </a:lnTo>
-                  <a:lnTo>
-                    <a:pt x="3131008" y="2309189"/>
-                  </a:lnTo>
-                  <a:lnTo>
-                    <a:pt x="3207476" y="2363383"/>
-                  </a:lnTo>
-                  <a:lnTo>
-                    <a:pt x="3283945" y="2414321"/>
-                  </a:lnTo>
-                  <a:lnTo>
-                    <a:pt x="3360413" y="2443895"/>
-                  </a:lnTo>
-                  <a:lnTo>
-                    <a:pt x="3436881" y="2434944"/>
-                  </a:lnTo>
-                  <a:lnTo>
-                    <a:pt x="3513350" y="2425889"/>
-                  </a:lnTo>
-                  <a:lnTo>
-                    <a:pt x="3589818" y="2416728"/>
-                  </a:lnTo>
-                  <a:lnTo>
-                    <a:pt x="3666287" y="2407460"/>
-                  </a:lnTo>
-                  <a:lnTo>
-                    <a:pt x="3742755" y="2398084"/>
-                  </a:lnTo>
-                  <a:lnTo>
-                    <a:pt x="3819224" y="2388599"/>
-                  </a:lnTo>
-                  <a:lnTo>
-                    <a:pt x="3895692" y="2379003"/>
-                  </a:lnTo>
-                  <a:lnTo>
-                    <a:pt x="3972160" y="2369296"/>
-                  </a:lnTo>
-                  <a:lnTo>
-                    <a:pt x="4048629" y="2359475"/>
-                  </a:lnTo>
-                  <a:lnTo>
-                    <a:pt x="4125097" y="2349539"/>
-                  </a:lnTo>
-                  <a:lnTo>
-                    <a:pt x="4201566" y="2339488"/>
-                  </a:lnTo>
-                  <a:lnTo>
-                    <a:pt x="4278034" y="2329319"/>
-                  </a:lnTo>
-                  <a:lnTo>
-                    <a:pt x="4354503" y="2319032"/>
-                  </a:lnTo>
-                  <a:lnTo>
-                    <a:pt x="4430971" y="2308625"/>
-                  </a:lnTo>
-                  <a:lnTo>
-                    <a:pt x="4507439" y="2298097"/>
-                  </a:lnTo>
-                  <a:lnTo>
-                    <a:pt x="4583908" y="2287446"/>
-                  </a:lnTo>
-                  <a:lnTo>
-                    <a:pt x="4660376" y="2276670"/>
-                  </a:lnTo>
-                  <a:lnTo>
-                    <a:pt x="4736845" y="2265769"/>
-                  </a:lnTo>
-                  <a:lnTo>
-                    <a:pt x="4813313" y="2254741"/>
-                  </a:lnTo>
-                  <a:lnTo>
-                    <a:pt x="4889782" y="2243584"/>
-                  </a:lnTo>
-                  <a:lnTo>
-                    <a:pt x="4966250" y="2232297"/>
-                  </a:lnTo>
-                  <a:lnTo>
-                    <a:pt x="5042719" y="2220878"/>
-                  </a:lnTo>
-                  <a:lnTo>
-                    <a:pt x="5119187" y="2209327"/>
-                  </a:lnTo>
-                  <a:lnTo>
-                    <a:pt x="5195655" y="2197640"/>
-                  </a:lnTo>
-                  <a:lnTo>
-                    <a:pt x="5272124" y="2185817"/>
-                  </a:lnTo>
-                  <a:lnTo>
-                    <a:pt x="5348592" y="2173857"/>
-                  </a:lnTo>
-                  <a:lnTo>
-                    <a:pt x="5425061" y="2161757"/>
-                  </a:lnTo>
-                  <a:lnTo>
-                    <a:pt x="5501529" y="2149516"/>
-                  </a:lnTo>
-                  <a:lnTo>
-                    <a:pt x="5577998" y="2137132"/>
-                  </a:lnTo>
-                  <a:lnTo>
-                    <a:pt x="5654466" y="2124603"/>
-                  </a:lnTo>
-                  <a:lnTo>
-                    <a:pt x="5730934" y="2111929"/>
-                  </a:lnTo>
-                  <a:lnTo>
-                    <a:pt x="5807403" y="2099106"/>
-                  </a:lnTo>
-                  <a:lnTo>
-                    <a:pt x="5883871" y="2086135"/>
-                  </a:lnTo>
-                  <a:lnTo>
-                    <a:pt x="5960340" y="2073011"/>
-                  </a:lnTo>
-                  <a:lnTo>
-                    <a:pt x="6036808" y="2059735"/>
-                  </a:lnTo>
-                  <a:lnTo>
-                    <a:pt x="6113277" y="2046304"/>
-                  </a:lnTo>
-                  <a:lnTo>
-                    <a:pt x="6189745" y="2032717"/>
-                  </a:lnTo>
-                  <a:lnTo>
-                    <a:pt x="6266213" y="2018971"/>
-                  </a:lnTo>
-                  <a:lnTo>
-                    <a:pt x="6342682" y="2005064"/>
-                  </a:lnTo>
-                  <a:lnTo>
-                    <a:pt x="6419150" y="1990996"/>
-                  </a:lnTo>
-                  <a:lnTo>
-                    <a:pt x="6495619" y="1976763"/>
-                  </a:lnTo>
-                  <a:lnTo>
-                    <a:pt x="6572087" y="1962365"/>
-                  </a:lnTo>
-                  <a:lnTo>
-                    <a:pt x="6648556" y="1947798"/>
-                  </a:lnTo>
-                  <a:lnTo>
-                    <a:pt x="6725024" y="1933062"/>
-                  </a:lnTo>
-                  <a:lnTo>
-                    <a:pt x="6801492" y="1918154"/>
-                  </a:lnTo>
-                  <a:lnTo>
-                    <a:pt x="6877961" y="1903072"/>
-                  </a:lnTo>
-                  <a:lnTo>
-                    <a:pt x="6954429" y="1887814"/>
-                  </a:lnTo>
-                  <a:lnTo>
-                    <a:pt x="7030898" y="1872378"/>
-                  </a:lnTo>
-                  <a:lnTo>
-                    <a:pt x="7107366" y="1856762"/>
-                  </a:lnTo>
-                  <a:lnTo>
-                    <a:pt x="7183835" y="1840964"/>
-                  </a:lnTo>
-                  <a:lnTo>
-                    <a:pt x="7260303" y="1824982"/>
-                  </a:lnTo>
-                  <a:lnTo>
-                    <a:pt x="7260303" y="3179625"/>
-                  </a:lnTo>
-                  <a:lnTo>
-                    <a:pt x="7183835" y="3177592"/>
-                  </a:lnTo>
-                  <a:lnTo>
-                    <a:pt x="7107366" y="3175429"/>
-                  </a:lnTo>
-                  <a:lnTo>
-                    <a:pt x="7030898" y="3173128"/>
-                  </a:lnTo>
-                  <a:lnTo>
-                    <a:pt x="6954429" y="3170680"/>
-                  </a:lnTo>
-                  <a:lnTo>
-                    <a:pt x="6877961" y="3168076"/>
-                  </a:lnTo>
-                  <a:lnTo>
-                    <a:pt x="6801492" y="3165304"/>
-                  </a:lnTo>
-                  <a:lnTo>
-                    <a:pt x="6725024" y="3162356"/>
-                  </a:lnTo>
-                  <a:lnTo>
-                    <a:pt x="6648556" y="3159220"/>
-                  </a:lnTo>
-                  <a:lnTo>
-                    <a:pt x="6572087" y="3155883"/>
-                  </a:lnTo>
-                  <a:lnTo>
-                    <a:pt x="6495619" y="3152333"/>
-                  </a:lnTo>
-                  <a:lnTo>
-                    <a:pt x="6419150" y="3148555"/>
-                  </a:lnTo>
-                  <a:lnTo>
-                    <a:pt x="6342682" y="3144537"/>
-                  </a:lnTo>
-                  <a:lnTo>
-                    <a:pt x="6266213" y="3140262"/>
-                  </a:lnTo>
-                  <a:lnTo>
-                    <a:pt x="6189745" y="3135713"/>
-                  </a:lnTo>
-                  <a:lnTo>
-                    <a:pt x="6113277" y="3130874"/>
-                  </a:lnTo>
-                  <a:lnTo>
-                    <a:pt x="6036808" y="3125726"/>
-                  </a:lnTo>
-                  <a:lnTo>
-                    <a:pt x="5960340" y="3120248"/>
-                  </a:lnTo>
-                  <a:lnTo>
-                    <a:pt x="5883871" y="3114421"/>
-                  </a:lnTo>
-                  <a:lnTo>
-                    <a:pt x="5807403" y="3108221"/>
-                  </a:lnTo>
-                  <a:lnTo>
-                    <a:pt x="5730934" y="3101625"/>
-                  </a:lnTo>
-                  <a:lnTo>
-                    <a:pt x="5654466" y="3094608"/>
-                  </a:lnTo>
-                  <a:lnTo>
-                    <a:pt x="5577998" y="3087142"/>
-                  </a:lnTo>
-                  <a:lnTo>
-                    <a:pt x="5501529" y="3079199"/>
-                  </a:lnTo>
-                  <a:lnTo>
-                    <a:pt x="5425061" y="3070749"/>
-                  </a:lnTo>
-                  <a:lnTo>
-                    <a:pt x="5348592" y="3061758"/>
-                  </a:lnTo>
-                  <a:lnTo>
-                    <a:pt x="5272124" y="3052193"/>
-                  </a:lnTo>
-                  <a:lnTo>
-                    <a:pt x="5195655" y="3042017"/>
-                  </a:lnTo>
-                  <a:lnTo>
-                    <a:pt x="5119187" y="3031190"/>
-                  </a:lnTo>
-                  <a:lnTo>
-                    <a:pt x="5042719" y="3019672"/>
-                  </a:lnTo>
-                  <a:lnTo>
-                    <a:pt x="4966250" y="3007417"/>
-                  </a:lnTo>
-                  <a:lnTo>
-                    <a:pt x="4889782" y="2994379"/>
-                  </a:lnTo>
-                  <a:lnTo>
-                    <a:pt x="4813313" y="2980509"/>
-                  </a:lnTo>
-                  <a:lnTo>
-                    <a:pt x="4736845" y="2965751"/>
-                  </a:lnTo>
-                  <a:lnTo>
-                    <a:pt x="4660376" y="2950051"/>
-                  </a:lnTo>
-                  <a:lnTo>
-                    <a:pt x="4583908" y="2933348"/>
-                  </a:lnTo>
-                  <a:lnTo>
-                    <a:pt x="4507439" y="2915577"/>
-                  </a:lnTo>
-                  <a:lnTo>
-                    <a:pt x="4430971" y="2896670"/>
-                  </a:lnTo>
-                  <a:lnTo>
-                    <a:pt x="4354503" y="2876556"/>
-                  </a:lnTo>
-                  <a:lnTo>
-                    <a:pt x="4278034" y="2855155"/>
-                  </a:lnTo>
-                  <a:lnTo>
-                    <a:pt x="4201566" y="2832388"/>
-                  </a:lnTo>
-                  <a:lnTo>
-                    <a:pt x="4125097" y="2808165"/>
-                  </a:lnTo>
-                  <a:lnTo>
-                    <a:pt x="4048629" y="2782395"/>
-                  </a:lnTo>
-                  <a:lnTo>
-                    <a:pt x="3972160" y="2754978"/>
-                  </a:lnTo>
-                  <a:lnTo>
-                    <a:pt x="3895692" y="2725808"/>
-                  </a:lnTo>
-                  <a:lnTo>
-                    <a:pt x="3819224" y="2694775"/>
-                  </a:lnTo>
-                  <a:lnTo>
-                    <a:pt x="3742755" y="2661759"/>
-                  </a:lnTo>
-                  <a:lnTo>
-                    <a:pt x="3666287" y="2626632"/>
-                  </a:lnTo>
-                  <a:lnTo>
-                    <a:pt x="3589818" y="2589261"/>
-                  </a:lnTo>
-                  <a:lnTo>
-                    <a:pt x="3513350" y="2549502"/>
-                  </a:lnTo>
-                  <a:lnTo>
-                    <a:pt x="3436881" y="2507203"/>
-                  </a:lnTo>
-                  <a:lnTo>
-                    <a:pt x="3360413" y="2462200"/>
-                  </a:lnTo>
-                  <a:lnTo>
-                    <a:pt x="3283945" y="2452743"/>
-                  </a:lnTo>
-                  <a:lnTo>
-                    <a:pt x="3207476" y="2461489"/>
-                  </a:lnTo>
-                  <a:lnTo>
-                    <a:pt x="3131008" y="2470134"/>
-                  </a:lnTo>
-                  <a:lnTo>
-                    <a:pt x="3054539" y="2478679"/>
-                  </a:lnTo>
-                  <a:lnTo>
-                    <a:pt x="2978071" y="2487126"/>
-                  </a:lnTo>
-                  <a:lnTo>
-                    <a:pt x="2901602" y="2495475"/>
-                  </a:lnTo>
-                  <a:lnTo>
-                    <a:pt x="2825134" y="2503729"/>
-                  </a:lnTo>
-                  <a:lnTo>
-                    <a:pt x="2748666" y="2511887"/>
-                  </a:lnTo>
-                  <a:lnTo>
-                    <a:pt x="2672197" y="2519951"/>
-                  </a:lnTo>
-                  <a:lnTo>
-                    <a:pt x="2595729" y="2527922"/>
-                  </a:lnTo>
-                  <a:lnTo>
-                    <a:pt x="2519260" y="2535801"/>
-                  </a:lnTo>
-                  <a:lnTo>
-                    <a:pt x="2442792" y="2543589"/>
-                  </a:lnTo>
-                  <a:lnTo>
-                    <a:pt x="2366323" y="2551288"/>
-                  </a:lnTo>
-                  <a:lnTo>
-                    <a:pt x="2289855" y="2558898"/>
-                  </a:lnTo>
-                  <a:lnTo>
-                    <a:pt x="2213386" y="2566420"/>
-                  </a:lnTo>
-                  <a:lnTo>
-                    <a:pt x="2136918" y="2573855"/>
-                  </a:lnTo>
-                  <a:lnTo>
-                    <a:pt x="2060450" y="2581205"/>
-                  </a:lnTo>
-                  <a:lnTo>
-                    <a:pt x="1983981" y="2588470"/>
-                  </a:lnTo>
-                  <a:lnTo>
-                    <a:pt x="1907513" y="2595651"/>
-                  </a:lnTo>
-                  <a:lnTo>
-                    <a:pt x="1831044" y="2602749"/>
-                  </a:lnTo>
-                  <a:lnTo>
-                    <a:pt x="1754576" y="2609766"/>
-                  </a:lnTo>
-                  <a:lnTo>
-                    <a:pt x="1678107" y="2616702"/>
-                  </a:lnTo>
-                  <a:lnTo>
-                    <a:pt x="1601639" y="2623558"/>
-                  </a:lnTo>
-                  <a:lnTo>
-                    <a:pt x="1525171" y="2630334"/>
-                  </a:lnTo>
-                  <a:lnTo>
-                    <a:pt x="1448702" y="2637033"/>
-                  </a:lnTo>
-                  <a:lnTo>
-                    <a:pt x="1372234" y="2643654"/>
-                  </a:lnTo>
-                  <a:lnTo>
-                    <a:pt x="1295765" y="2650199"/>
-                  </a:lnTo>
-                  <a:lnTo>
-                    <a:pt x="1219297" y="2656669"/>
-                  </a:lnTo>
-                  <a:lnTo>
-                    <a:pt x="1142828" y="2663064"/>
-                  </a:lnTo>
-                  <a:lnTo>
-                    <a:pt x="1066360" y="2669385"/>
-                  </a:lnTo>
-                  <a:lnTo>
-                    <a:pt x="989892" y="2675634"/>
-                  </a:lnTo>
-                  <a:lnTo>
-                    <a:pt x="913423" y="2681810"/>
-                  </a:lnTo>
-                  <a:lnTo>
-                    <a:pt x="836955" y="2687916"/>
-                  </a:lnTo>
-                  <a:lnTo>
-                    <a:pt x="760486" y="2693950"/>
-                  </a:lnTo>
-                  <a:lnTo>
-                    <a:pt x="684018" y="2699916"/>
-                  </a:lnTo>
-                  <a:lnTo>
-                    <a:pt x="607549" y="2705812"/>
-                  </a:lnTo>
-                  <a:lnTo>
-                    <a:pt x="531081" y="2711641"/>
-                  </a:lnTo>
-                  <a:lnTo>
-                    <a:pt x="454613" y="2717402"/>
-                  </a:lnTo>
-                  <a:lnTo>
-                    <a:pt x="378144" y="2723097"/>
-                  </a:lnTo>
-                  <a:lnTo>
-                    <a:pt x="301676" y="2728726"/>
-                  </a:lnTo>
-                  <a:lnTo>
-                    <a:pt x="225207" y="2734291"/>
-                  </a:lnTo>
-                  <a:lnTo>
-                    <a:pt x="148739" y="2739791"/>
-                  </a:lnTo>
-                  <a:lnTo>
-                    <a:pt x="72270" y="2745228"/>
-                  </a:lnTo>
-                  <a:lnTo>
-                    <a:pt x="0" y="2750307"/>
+                    <a:pt x="7682587" y="0"/>
+                  </a:lnTo>
+                  <a:lnTo>
+                    <a:pt x="7682587" y="0"/>
+                  </a:lnTo>
+                </a:path>
+              </a:pathLst>
+            </a:custGeom>
+            <a:ln w="17246" cap="flat">
+              <a:solidFill>
+                <a:srgbClr val="EBEBEB">
+                  <a:alpha val="100000"/>
+                </a:srgbClr>
+              </a:solidFill>
+              <a:prstDash val="solid"/>
+              <a:round/>
+            </a:ln>
+          </p:spPr>
+          <p:txBody>
+            <a:bodyPr/>
+            <a:lstStyle/>
+            <a:p/>
+          </p:txBody>
+        </p:sp>
+        <p:sp>
+          <p:nvSpPr>
+            <p:cNvPr id="22" name="pl22"/>
+            <p:cNvSpPr/>
+            <p:nvPr/>
+          </p:nvSpPr>
+          <p:spPr>
+            <a:xfrm>
+              <a:off x="1701364" y="2185486"/>
+              <a:ext cx="0" cy="3427824"/>
+            </a:xfrm>
+            <a:custGeom>
+              <a:avLst/>
+              <a:pathLst>
+                <a:path w="0" h="3427824">
+                  <a:moveTo>
+                    <a:pt x="0" y="3427824"/>
+                  </a:moveTo>
+                  <a:lnTo>
+                    <a:pt x="0" y="0"/>
+                  </a:lnTo>
+                  <a:lnTo>
+                    <a:pt x="0" y="0"/>
+                  </a:lnTo>
+                </a:path>
+              </a:pathLst>
+            </a:custGeom>
+            <a:ln w="17246" cap="flat">
+              <a:solidFill>
+                <a:srgbClr val="EBEBEB">
+                  <a:alpha val="100000"/>
+                </a:srgbClr>
+              </a:solidFill>
+              <a:prstDash val="solid"/>
+              <a:round/>
+            </a:ln>
+          </p:spPr>
+          <p:txBody>
+            <a:bodyPr/>
+            <a:lstStyle/>
+            <a:p/>
+          </p:txBody>
+        </p:sp>
+        <p:sp>
+          <p:nvSpPr>
+            <p:cNvPr id="23" name="pl23"/>
+            <p:cNvSpPr/>
+            <p:nvPr/>
+          </p:nvSpPr>
+          <p:spPr>
+            <a:xfrm>
+              <a:off x="2574385" y="2185486"/>
+              <a:ext cx="0" cy="3427824"/>
+            </a:xfrm>
+            <a:custGeom>
+              <a:avLst/>
+              <a:pathLst>
+                <a:path w="0" h="3427824">
+                  <a:moveTo>
+                    <a:pt x="0" y="3427824"/>
+                  </a:moveTo>
+                  <a:lnTo>
+                    <a:pt x="0" y="0"/>
+                  </a:lnTo>
+                  <a:lnTo>
+                    <a:pt x="0" y="0"/>
+                  </a:lnTo>
+                </a:path>
+              </a:pathLst>
+            </a:custGeom>
+            <a:ln w="17246" cap="flat">
+              <a:solidFill>
+                <a:srgbClr val="EBEBEB">
+                  <a:alpha val="100000"/>
+                </a:srgbClr>
+              </a:solidFill>
+              <a:prstDash val="solid"/>
+              <a:round/>
+            </a:ln>
+          </p:spPr>
+          <p:txBody>
+            <a:bodyPr/>
+            <a:lstStyle/>
+            <a:p/>
+          </p:txBody>
+        </p:sp>
+        <p:sp>
+          <p:nvSpPr>
+            <p:cNvPr id="24" name="pl24"/>
+            <p:cNvSpPr/>
+            <p:nvPr/>
+          </p:nvSpPr>
+          <p:spPr>
+            <a:xfrm>
+              <a:off x="3447406" y="2185486"/>
+              <a:ext cx="0" cy="3427824"/>
+            </a:xfrm>
+            <a:custGeom>
+              <a:avLst/>
+              <a:pathLst>
+                <a:path w="0" h="3427824">
+                  <a:moveTo>
+                    <a:pt x="0" y="3427824"/>
+                  </a:moveTo>
+                  <a:lnTo>
+                    <a:pt x="0" y="0"/>
+                  </a:lnTo>
+                  <a:lnTo>
+                    <a:pt x="0" y="0"/>
+                  </a:lnTo>
+                </a:path>
+              </a:pathLst>
+            </a:custGeom>
+            <a:ln w="17246" cap="flat">
+              <a:solidFill>
+                <a:srgbClr val="EBEBEB">
+                  <a:alpha val="100000"/>
+                </a:srgbClr>
+              </a:solidFill>
+              <a:prstDash val="solid"/>
+              <a:round/>
+            </a:ln>
+          </p:spPr>
+          <p:txBody>
+            <a:bodyPr/>
+            <a:lstStyle/>
+            <a:p/>
+          </p:txBody>
+        </p:sp>
+        <p:sp>
+          <p:nvSpPr>
+            <p:cNvPr id="25" name="pl25"/>
+            <p:cNvSpPr/>
+            <p:nvPr/>
+          </p:nvSpPr>
+          <p:spPr>
+            <a:xfrm>
+              <a:off x="4320427" y="2185486"/>
+              <a:ext cx="0" cy="3427824"/>
+            </a:xfrm>
+            <a:custGeom>
+              <a:avLst/>
+              <a:pathLst>
+                <a:path w="0" h="3427824">
+                  <a:moveTo>
+                    <a:pt x="0" y="3427824"/>
+                  </a:moveTo>
+                  <a:lnTo>
+                    <a:pt x="0" y="0"/>
+                  </a:lnTo>
+                  <a:lnTo>
+                    <a:pt x="0" y="0"/>
+                  </a:lnTo>
+                </a:path>
+              </a:pathLst>
+            </a:custGeom>
+            <a:ln w="17246" cap="flat">
+              <a:solidFill>
+                <a:srgbClr val="EBEBEB">
+                  <a:alpha val="100000"/>
+                </a:srgbClr>
+              </a:solidFill>
+              <a:prstDash val="solid"/>
+              <a:round/>
+            </a:ln>
+          </p:spPr>
+          <p:txBody>
+            <a:bodyPr/>
+            <a:lstStyle/>
+            <a:p/>
+          </p:txBody>
+        </p:sp>
+        <p:sp>
+          <p:nvSpPr>
+            <p:cNvPr id="26" name="pl26"/>
+            <p:cNvSpPr/>
+            <p:nvPr/>
+          </p:nvSpPr>
+          <p:spPr>
+            <a:xfrm>
+              <a:off x="5193449" y="2185486"/>
+              <a:ext cx="0" cy="3427824"/>
+            </a:xfrm>
+            <a:custGeom>
+              <a:avLst/>
+              <a:pathLst>
+                <a:path w="0" h="3427824">
+                  <a:moveTo>
+                    <a:pt x="0" y="3427824"/>
+                  </a:moveTo>
+                  <a:lnTo>
+                    <a:pt x="0" y="0"/>
+                  </a:lnTo>
+                  <a:lnTo>
+                    <a:pt x="0" y="0"/>
+                  </a:lnTo>
+                </a:path>
+              </a:pathLst>
+            </a:custGeom>
+            <a:ln w="17246" cap="flat">
+              <a:solidFill>
+                <a:srgbClr val="EBEBEB">
+                  <a:alpha val="100000"/>
+                </a:srgbClr>
+              </a:solidFill>
+              <a:prstDash val="solid"/>
+              <a:round/>
+            </a:ln>
+          </p:spPr>
+          <p:txBody>
+            <a:bodyPr/>
+            <a:lstStyle/>
+            <a:p/>
+          </p:txBody>
+        </p:sp>
+        <p:sp>
+          <p:nvSpPr>
+            <p:cNvPr id="27" name="pl27"/>
+            <p:cNvSpPr/>
+            <p:nvPr/>
+          </p:nvSpPr>
+          <p:spPr>
+            <a:xfrm>
+              <a:off x="6066470" y="2185486"/>
+              <a:ext cx="0" cy="3427824"/>
+            </a:xfrm>
+            <a:custGeom>
+              <a:avLst/>
+              <a:pathLst>
+                <a:path w="0" h="3427824">
+                  <a:moveTo>
+                    <a:pt x="0" y="3427824"/>
+                  </a:moveTo>
+                  <a:lnTo>
+                    <a:pt x="0" y="0"/>
+                  </a:lnTo>
+                  <a:lnTo>
+                    <a:pt x="0" y="0"/>
+                  </a:lnTo>
+                </a:path>
+              </a:pathLst>
+            </a:custGeom>
+            <a:ln w="17246" cap="flat">
+              <a:solidFill>
+                <a:srgbClr val="EBEBEB">
+                  <a:alpha val="100000"/>
+                </a:srgbClr>
+              </a:solidFill>
+              <a:prstDash val="solid"/>
+              <a:round/>
+            </a:ln>
+          </p:spPr>
+          <p:txBody>
+            <a:bodyPr/>
+            <a:lstStyle/>
+            <a:p/>
+          </p:txBody>
+        </p:sp>
+        <p:sp>
+          <p:nvSpPr>
+            <p:cNvPr id="28" name="pl28"/>
+            <p:cNvSpPr/>
+            <p:nvPr/>
+          </p:nvSpPr>
+          <p:spPr>
+            <a:xfrm>
+              <a:off x="6939491" y="2185486"/>
+              <a:ext cx="0" cy="3427824"/>
+            </a:xfrm>
+            <a:custGeom>
+              <a:avLst/>
+              <a:pathLst>
+                <a:path w="0" h="3427824">
+                  <a:moveTo>
+                    <a:pt x="0" y="3427824"/>
+                  </a:moveTo>
+                  <a:lnTo>
+                    <a:pt x="0" y="0"/>
+                  </a:lnTo>
+                  <a:lnTo>
+                    <a:pt x="0" y="0"/>
+                  </a:lnTo>
+                </a:path>
+              </a:pathLst>
+            </a:custGeom>
+            <a:ln w="17246" cap="flat">
+              <a:solidFill>
+                <a:srgbClr val="EBEBEB">
+                  <a:alpha val="100000"/>
+                </a:srgbClr>
+              </a:solidFill>
+              <a:prstDash val="solid"/>
+              <a:round/>
+            </a:ln>
+          </p:spPr>
+          <p:txBody>
+            <a:bodyPr/>
+            <a:lstStyle/>
+            <a:p/>
+          </p:txBody>
+        </p:sp>
+        <p:sp>
+          <p:nvSpPr>
+            <p:cNvPr id="29" name="pl29"/>
+            <p:cNvSpPr/>
+            <p:nvPr/>
+          </p:nvSpPr>
+          <p:spPr>
+            <a:xfrm>
+              <a:off x="7812512" y="2185486"/>
+              <a:ext cx="0" cy="3427824"/>
+            </a:xfrm>
+            <a:custGeom>
+              <a:avLst/>
+              <a:pathLst>
+                <a:path w="0" h="3427824">
+                  <a:moveTo>
+                    <a:pt x="0" y="3427824"/>
+                  </a:moveTo>
+                  <a:lnTo>
+                    <a:pt x="0" y="0"/>
+                  </a:lnTo>
+                  <a:lnTo>
+                    <a:pt x="0" y="0"/>
+                  </a:lnTo>
+                </a:path>
+              </a:pathLst>
+            </a:custGeom>
+            <a:ln w="17246" cap="flat">
+              <a:solidFill>
+                <a:srgbClr val="EBEBEB">
+                  <a:alpha val="100000"/>
+                </a:srgbClr>
+              </a:solidFill>
+              <a:prstDash val="solid"/>
+              <a:round/>
+            </a:ln>
+          </p:spPr>
+          <p:txBody>
+            <a:bodyPr/>
+            <a:lstStyle/>
+            <a:p/>
+          </p:txBody>
+        </p:sp>
+        <p:sp>
+          <p:nvSpPr>
+            <p:cNvPr id="30" name="pg30"/>
+            <p:cNvSpPr/>
+            <p:nvPr/>
+          </p:nvSpPr>
+          <p:spPr>
+            <a:xfrm>
+              <a:off x="915645" y="2185486"/>
+              <a:ext cx="7260303" cy="3239600"/>
+            </a:xfrm>
+            <a:custGeom>
+              <a:avLst/>
+              <a:pathLst>
+                <a:path w="7260303" h="3239600">
+                  <a:moveTo>
+                    <a:pt x="1564335" y="0"/>
+                  </a:moveTo>
+                  <a:lnTo>
+                    <a:pt x="1601639" y="98919"/>
+                  </a:lnTo>
+                  <a:lnTo>
+                    <a:pt x="1678107" y="289510"/>
+                  </a:lnTo>
+                  <a:lnTo>
+                    <a:pt x="1754576" y="468653"/>
+                  </a:lnTo>
+                  <a:lnTo>
+                    <a:pt x="1831044" y="637036"/>
+                  </a:lnTo>
+                  <a:lnTo>
+                    <a:pt x="1907513" y="795305"/>
+                  </a:lnTo>
+                  <a:lnTo>
+                    <a:pt x="1983981" y="944068"/>
+                  </a:lnTo>
+                  <a:lnTo>
+                    <a:pt x="2060450" y="1083895"/>
+                  </a:lnTo>
+                  <a:lnTo>
+                    <a:pt x="2136918" y="1215324"/>
+                  </a:lnTo>
+                  <a:lnTo>
+                    <a:pt x="2213386" y="1338859"/>
+                  </a:lnTo>
+                  <a:lnTo>
+                    <a:pt x="2289855" y="1454973"/>
+                  </a:lnTo>
+                  <a:lnTo>
+                    <a:pt x="2366323" y="1564113"/>
+                  </a:lnTo>
+                  <a:lnTo>
+                    <a:pt x="2442792" y="1666698"/>
+                  </a:lnTo>
+                  <a:lnTo>
+                    <a:pt x="2519260" y="1763120"/>
+                  </a:lnTo>
+                  <a:lnTo>
+                    <a:pt x="2595729" y="1853752"/>
+                  </a:lnTo>
+                  <a:lnTo>
+                    <a:pt x="2672197" y="1938939"/>
+                  </a:lnTo>
+                  <a:lnTo>
+                    <a:pt x="2748666" y="2019010"/>
+                  </a:lnTo>
+                  <a:lnTo>
+                    <a:pt x="2825134" y="2094271"/>
+                  </a:lnTo>
+                  <a:lnTo>
+                    <a:pt x="2901602" y="2165012"/>
+                  </a:lnTo>
+                  <a:lnTo>
+                    <a:pt x="2978071" y="2231504"/>
+                  </a:lnTo>
+                  <a:lnTo>
+                    <a:pt x="3054539" y="2294002"/>
+                  </a:lnTo>
+                  <a:lnTo>
+                    <a:pt x="3131008" y="2352746"/>
+                  </a:lnTo>
+                  <a:lnTo>
+                    <a:pt x="3207476" y="2407961"/>
+                  </a:lnTo>
+                  <a:lnTo>
+                    <a:pt x="3283945" y="2459860"/>
+                  </a:lnTo>
+                  <a:lnTo>
+                    <a:pt x="3360413" y="2489993"/>
+                  </a:lnTo>
+                  <a:lnTo>
+                    <a:pt x="3436881" y="2480873"/>
+                  </a:lnTo>
+                  <a:lnTo>
+                    <a:pt x="3513350" y="2471647"/>
+                  </a:lnTo>
+                  <a:lnTo>
+                    <a:pt x="3589818" y="2462313"/>
+                  </a:lnTo>
+                  <a:lnTo>
+                    <a:pt x="3666287" y="2452870"/>
+                  </a:lnTo>
+                  <a:lnTo>
+                    <a:pt x="3742755" y="2443318"/>
+                  </a:lnTo>
+                  <a:lnTo>
+                    <a:pt x="3819224" y="2433653"/>
+                  </a:lnTo>
+                  <a:lnTo>
+                    <a:pt x="3895692" y="2423877"/>
+                  </a:lnTo>
+                  <a:lnTo>
+                    <a:pt x="3972160" y="2413986"/>
+                  </a:lnTo>
+                  <a:lnTo>
+                    <a:pt x="4048629" y="2403980"/>
+                  </a:lnTo>
+                  <a:lnTo>
+                    <a:pt x="4125097" y="2393857"/>
+                  </a:lnTo>
+                  <a:lnTo>
+                    <a:pt x="4201566" y="2383616"/>
+                  </a:lnTo>
+                  <a:lnTo>
+                    <a:pt x="4278034" y="2373255"/>
+                  </a:lnTo>
+                  <a:lnTo>
+                    <a:pt x="4354503" y="2362774"/>
+                  </a:lnTo>
+                  <a:lnTo>
+                    <a:pt x="4430971" y="2352171"/>
+                  </a:lnTo>
+                  <a:lnTo>
+                    <a:pt x="4507439" y="2341444"/>
+                  </a:lnTo>
+                  <a:lnTo>
+                    <a:pt x="4583908" y="2330592"/>
+                  </a:lnTo>
+                  <a:lnTo>
+                    <a:pt x="4660376" y="2319613"/>
+                  </a:lnTo>
+                  <a:lnTo>
+                    <a:pt x="4736845" y="2308506"/>
+                  </a:lnTo>
+                  <a:lnTo>
+                    <a:pt x="4813313" y="2297270"/>
+                  </a:lnTo>
+                  <a:lnTo>
+                    <a:pt x="4889782" y="2285903"/>
+                  </a:lnTo>
+                  <a:lnTo>
+                    <a:pt x="4966250" y="2274403"/>
+                  </a:lnTo>
+                  <a:lnTo>
+                    <a:pt x="5042719" y="2262769"/>
+                  </a:lnTo>
+                  <a:lnTo>
+                    <a:pt x="5119187" y="2250999"/>
+                  </a:lnTo>
+                  <a:lnTo>
+                    <a:pt x="5195655" y="2239092"/>
+                  </a:lnTo>
+                  <a:lnTo>
+                    <a:pt x="5272124" y="2227046"/>
+                  </a:lnTo>
+                  <a:lnTo>
+                    <a:pt x="5348592" y="2214860"/>
+                  </a:lnTo>
+                  <a:lnTo>
+                    <a:pt x="5425061" y="2202532"/>
+                  </a:lnTo>
+                  <a:lnTo>
+                    <a:pt x="5501529" y="2190060"/>
+                  </a:lnTo>
+                  <a:lnTo>
+                    <a:pt x="5577998" y="2177442"/>
+                  </a:lnTo>
+                  <a:lnTo>
+                    <a:pt x="5654466" y="2164677"/>
+                  </a:lnTo>
+                  <a:lnTo>
+                    <a:pt x="5730934" y="2151764"/>
+                  </a:lnTo>
+                  <a:lnTo>
+                    <a:pt x="5807403" y="2138700"/>
+                  </a:lnTo>
+                  <a:lnTo>
+                    <a:pt x="5883871" y="2125483"/>
+                  </a:lnTo>
+                  <a:lnTo>
+                    <a:pt x="5960340" y="2112113"/>
+                  </a:lnTo>
+                  <a:lnTo>
+                    <a:pt x="6036808" y="2098586"/>
+                  </a:lnTo>
+                  <a:lnTo>
+                    <a:pt x="6113277" y="2084902"/>
+                  </a:lnTo>
+                  <a:lnTo>
+                    <a:pt x="6189745" y="2071058"/>
+                  </a:lnTo>
+                  <a:lnTo>
+                    <a:pt x="6266213" y="2057052"/>
+                  </a:lnTo>
+                  <a:lnTo>
+                    <a:pt x="6342682" y="2042884"/>
+                  </a:lnTo>
+                  <a:lnTo>
+                    <a:pt x="6419150" y="2028550"/>
+                  </a:lnTo>
+                  <a:lnTo>
+                    <a:pt x="6495619" y="2014049"/>
+                  </a:lnTo>
+                  <a:lnTo>
+                    <a:pt x="6572087" y="1999379"/>
+                  </a:lnTo>
+                  <a:lnTo>
+                    <a:pt x="6648556" y="1984537"/>
+                  </a:lnTo>
+                  <a:lnTo>
+                    <a:pt x="6725024" y="1969523"/>
+                  </a:lnTo>
+                  <a:lnTo>
+                    <a:pt x="6801492" y="1954333"/>
+                  </a:lnTo>
+                  <a:lnTo>
+                    <a:pt x="6877961" y="1938967"/>
+                  </a:lnTo>
+                  <a:lnTo>
+                    <a:pt x="6954429" y="1923421"/>
+                  </a:lnTo>
+                  <a:lnTo>
+                    <a:pt x="7030898" y="1907694"/>
+                  </a:lnTo>
+                  <a:lnTo>
+                    <a:pt x="7107366" y="1891784"/>
+                  </a:lnTo>
+                  <a:lnTo>
+                    <a:pt x="7183835" y="1875688"/>
+                  </a:lnTo>
+                  <a:lnTo>
+                    <a:pt x="7260303" y="1859404"/>
+                  </a:lnTo>
+                  <a:lnTo>
+                    <a:pt x="7260303" y="3239600"/>
+                  </a:lnTo>
+                  <a:lnTo>
+                    <a:pt x="7183835" y="3237529"/>
+                  </a:lnTo>
+                  <a:lnTo>
+                    <a:pt x="7107366" y="3235325"/>
+                  </a:lnTo>
+                  <a:lnTo>
+                    <a:pt x="7030898" y="3232980"/>
+                  </a:lnTo>
+                  <a:lnTo>
+                    <a:pt x="6954429" y="3230486"/>
+                  </a:lnTo>
+                  <a:lnTo>
+                    <a:pt x="6877961" y="3227832"/>
+                  </a:lnTo>
+                  <a:lnTo>
+                    <a:pt x="6801492" y="3225009"/>
+                  </a:lnTo>
+                  <a:lnTo>
+                    <a:pt x="6725024" y="3222005"/>
+                  </a:lnTo>
+                  <a:lnTo>
+                    <a:pt x="6648556" y="3218810"/>
+                  </a:lnTo>
+                  <a:lnTo>
+                    <a:pt x="6572087" y="3215410"/>
+                  </a:lnTo>
+                  <a:lnTo>
+                    <a:pt x="6495619" y="3211792"/>
+                  </a:lnTo>
+                  <a:lnTo>
+                    <a:pt x="6419150" y="3207944"/>
+                  </a:lnTo>
+                  <a:lnTo>
+                    <a:pt x="6342682" y="3203850"/>
+                  </a:lnTo>
+                  <a:lnTo>
+                    <a:pt x="6266213" y="3199494"/>
+                  </a:lnTo>
+                  <a:lnTo>
+                    <a:pt x="6189745" y="3194860"/>
+                  </a:lnTo>
+                  <a:lnTo>
+                    <a:pt x="6113277" y="3189929"/>
+                  </a:lnTo>
+                  <a:lnTo>
+                    <a:pt x="6036808" y="3184684"/>
+                  </a:lnTo>
+                  <a:lnTo>
+                    <a:pt x="5960340" y="3179103"/>
+                  </a:lnTo>
+                  <a:lnTo>
+                    <a:pt x="5883871" y="3173166"/>
+                  </a:lnTo>
+                  <a:lnTo>
+                    <a:pt x="5807403" y="3166849"/>
+                  </a:lnTo>
+                  <a:lnTo>
+                    <a:pt x="5730934" y="3160129"/>
+                  </a:lnTo>
+                  <a:lnTo>
+                    <a:pt x="5654466" y="3152979"/>
+                  </a:lnTo>
+                  <a:lnTo>
+                    <a:pt x="5577998" y="3145372"/>
+                  </a:lnTo>
+                  <a:lnTo>
+                    <a:pt x="5501529" y="3137280"/>
+                  </a:lnTo>
+                  <a:lnTo>
+                    <a:pt x="5425061" y="3128670"/>
+                  </a:lnTo>
+                  <a:lnTo>
+                    <a:pt x="5348592" y="3119509"/>
+                  </a:lnTo>
+                  <a:lnTo>
+                    <a:pt x="5272124" y="3109764"/>
+                  </a:lnTo>
+                  <a:lnTo>
+                    <a:pt x="5195655" y="3099396"/>
+                  </a:lnTo>
+                  <a:lnTo>
+                    <a:pt x="5119187" y="3088365"/>
+                  </a:lnTo>
+                  <a:lnTo>
+                    <a:pt x="5042719" y="3076629"/>
+                  </a:lnTo>
+                  <a:lnTo>
+                    <a:pt x="4966250" y="3064143"/>
+                  </a:lnTo>
+                  <a:lnTo>
+                    <a:pt x="4889782" y="3050860"/>
+                  </a:lnTo>
+                  <a:lnTo>
+                    <a:pt x="4813313" y="3036727"/>
+                  </a:lnTo>
+                  <a:lnTo>
+                    <a:pt x="4736845" y="3021692"/>
+                  </a:lnTo>
+                  <a:lnTo>
+                    <a:pt x="4660376" y="3005696"/>
+                  </a:lnTo>
+                  <a:lnTo>
+                    <a:pt x="4583908" y="2988677"/>
+                  </a:lnTo>
+                  <a:lnTo>
+                    <a:pt x="4507439" y="2970571"/>
+                  </a:lnTo>
+                  <a:lnTo>
+                    <a:pt x="4430971" y="2951308"/>
+                  </a:lnTo>
+                  <a:lnTo>
+                    <a:pt x="4354503" y="2930814"/>
+                  </a:lnTo>
+                  <a:lnTo>
+                    <a:pt x="4278034" y="2909010"/>
+                  </a:lnTo>
+                  <a:lnTo>
+                    <a:pt x="4201566" y="2885813"/>
+                  </a:lnTo>
+                  <a:lnTo>
+                    <a:pt x="4125097" y="2861133"/>
+                  </a:lnTo>
+                  <a:lnTo>
+                    <a:pt x="4048629" y="2834877"/>
+                  </a:lnTo>
+                  <a:lnTo>
+                    <a:pt x="3972160" y="2806942"/>
+                  </a:lnTo>
+                  <a:lnTo>
+                    <a:pt x="3895692" y="2777223"/>
+                  </a:lnTo>
+                  <a:lnTo>
+                    <a:pt x="3819224" y="2745604"/>
+                  </a:lnTo>
+                  <a:lnTo>
+                    <a:pt x="3742755" y="2711965"/>
+                  </a:lnTo>
+                  <a:lnTo>
+                    <a:pt x="3666287" y="2676176"/>
+                  </a:lnTo>
+                  <a:lnTo>
+                    <a:pt x="3589818" y="2638101"/>
+                  </a:lnTo>
+                  <a:lnTo>
+                    <a:pt x="3513350" y="2597592"/>
+                  </a:lnTo>
+                  <a:lnTo>
+                    <a:pt x="3436881" y="2554494"/>
+                  </a:lnTo>
+                  <a:lnTo>
+                    <a:pt x="3360413" y="2508642"/>
+                  </a:lnTo>
+                  <a:lnTo>
+                    <a:pt x="3283945" y="2499007"/>
+                  </a:lnTo>
+                  <a:lnTo>
+                    <a:pt x="3207476" y="2507918"/>
+                  </a:lnTo>
+                  <a:lnTo>
+                    <a:pt x="3131008" y="2516726"/>
+                  </a:lnTo>
+                  <a:lnTo>
+                    <a:pt x="3054539" y="2525433"/>
+                  </a:lnTo>
+                  <a:lnTo>
+                    <a:pt x="2978071" y="2534039"/>
+                  </a:lnTo>
+                  <a:lnTo>
+                    <a:pt x="2901602" y="2542546"/>
+                  </a:lnTo>
+                  <a:lnTo>
+                    <a:pt x="2825134" y="2550955"/>
+                  </a:lnTo>
+                  <a:lnTo>
+                    <a:pt x="2748666" y="2559267"/>
+                  </a:lnTo>
+                  <a:lnTo>
+                    <a:pt x="2672197" y="2567483"/>
+                  </a:lnTo>
+                  <a:lnTo>
+                    <a:pt x="2595729" y="2575604"/>
+                  </a:lnTo>
+                  <a:lnTo>
+                    <a:pt x="2519260" y="2583632"/>
+                  </a:lnTo>
+                  <a:lnTo>
+                    <a:pt x="2442792" y="2591567"/>
+                  </a:lnTo>
+                  <a:lnTo>
+                    <a:pt x="2366323" y="2599411"/>
+                  </a:lnTo>
+                  <a:lnTo>
+                    <a:pt x="2289855" y="2607164"/>
+                  </a:lnTo>
+                  <a:lnTo>
+                    <a:pt x="2213386" y="2614828"/>
+                  </a:lnTo>
+                  <a:lnTo>
+                    <a:pt x="2136918" y="2622404"/>
+                  </a:lnTo>
+                  <a:lnTo>
+                    <a:pt x="2060450" y="2629892"/>
+                  </a:lnTo>
+                  <a:lnTo>
+                    <a:pt x="1983981" y="2637294"/>
+                  </a:lnTo>
+                  <a:lnTo>
+                    <a:pt x="1907513" y="2644611"/>
+                  </a:lnTo>
+                  <a:lnTo>
+                    <a:pt x="1831044" y="2651843"/>
+                  </a:lnTo>
+                  <a:lnTo>
+                    <a:pt x="1754576" y="2658992"/>
+                  </a:lnTo>
+                  <a:lnTo>
+                    <a:pt x="1678107" y="2666059"/>
+                  </a:lnTo>
+                  <a:lnTo>
+                    <a:pt x="1601639" y="2673044"/>
+                  </a:lnTo>
+                  <a:lnTo>
+                    <a:pt x="1525171" y="2679948"/>
+                  </a:lnTo>
+                  <a:lnTo>
+                    <a:pt x="1448702" y="2686773"/>
+                  </a:lnTo>
+                  <a:lnTo>
+                    <a:pt x="1372234" y="2693520"/>
+                  </a:lnTo>
+                  <a:lnTo>
+                    <a:pt x="1295765" y="2700188"/>
+                  </a:lnTo>
+                  <a:lnTo>
+                    <a:pt x="1219297" y="2706780"/>
+                  </a:lnTo>
+                  <a:lnTo>
+                    <a:pt x="1142828" y="2713296"/>
+                  </a:lnTo>
+                  <a:lnTo>
+                    <a:pt x="1066360" y="2719736"/>
+                  </a:lnTo>
+                  <a:lnTo>
+                    <a:pt x="989892" y="2726102"/>
+                  </a:lnTo>
+                  <a:lnTo>
+                    <a:pt x="913423" y="2732395"/>
+                  </a:lnTo>
+                  <a:lnTo>
+                    <a:pt x="836955" y="2738616"/>
+                  </a:lnTo>
+                  <a:lnTo>
+                    <a:pt x="760486" y="2744765"/>
+                  </a:lnTo>
+                  <a:lnTo>
+                    <a:pt x="684018" y="2750842"/>
+                  </a:lnTo>
+                  <a:lnTo>
+                    <a:pt x="607549" y="2756850"/>
+                  </a:lnTo>
+                  <a:lnTo>
+                    <a:pt x="531081" y="2762789"/>
+                  </a:lnTo>
+                  <a:lnTo>
+                    <a:pt x="454613" y="2768659"/>
+                  </a:lnTo>
+                  <a:lnTo>
+                    <a:pt x="378144" y="2774461"/>
+                  </a:lnTo>
+                  <a:lnTo>
+                    <a:pt x="301676" y="2780197"/>
+                  </a:lnTo>
+                  <a:lnTo>
+                    <a:pt x="225207" y="2785866"/>
+                  </a:lnTo>
+                  <a:lnTo>
+                    <a:pt x="148739" y="2791470"/>
+                  </a:lnTo>
+                  <a:lnTo>
+                    <a:pt x="72270" y="2797009"/>
+                  </a:lnTo>
+                  <a:lnTo>
+                    <a:pt x="0" y="2802184"/>
                   </a:lnTo>
                   <a:close/>
                 </a:path>
@@ -3543,246 +3930,246 @@
         </p:sp>
         <p:sp>
           <p:nvSpPr>
-            <p:cNvPr id="22" name="pl22"/>
+            <p:cNvPr id="31" name="pl31"/>
             <p:cNvSpPr/>
             <p:nvPr/>
           </p:nvSpPr>
           <p:spPr>
             <a:xfrm>
-              <a:off x="2479981" y="2209169"/>
-              <a:ext cx="5695967" cy="2443895"/>
+              <a:off x="2479980" y="2185486"/>
+              <a:ext cx="5695968" cy="2489993"/>
             </a:xfrm>
             <a:custGeom>
               <a:avLst/>
               <a:pathLst>
-                <a:path w="5695967" h="2443895">
+                <a:path w="5695968" h="2489993">
                   <a:moveTo>
                     <a:pt x="0" y="0"/>
                   </a:moveTo>
                   <a:lnTo>
-                    <a:pt x="37303" y="97085"/>
-                  </a:lnTo>
-                  <a:lnTo>
-                    <a:pt x="113771" y="284147"/>
-                  </a:lnTo>
-                  <a:lnTo>
-                    <a:pt x="190239" y="459975"/>
-                  </a:lnTo>
-                  <a:lnTo>
-                    <a:pt x="266708" y="625241"/>
-                  </a:lnTo>
-                  <a:lnTo>
-                    <a:pt x="343176" y="780580"/>
-                  </a:lnTo>
-                  <a:lnTo>
-                    <a:pt x="419645" y="926589"/>
-                  </a:lnTo>
-                  <a:lnTo>
-                    <a:pt x="496113" y="1063828"/>
-                  </a:lnTo>
-                  <a:lnTo>
-                    <a:pt x="572582" y="1192824"/>
-                  </a:lnTo>
-                  <a:lnTo>
-                    <a:pt x="649050" y="1314071"/>
-                  </a:lnTo>
-                  <a:lnTo>
-                    <a:pt x="725518" y="1428036"/>
-                  </a:lnTo>
-                  <a:lnTo>
-                    <a:pt x="801987" y="1535156"/>
-                  </a:lnTo>
-                  <a:lnTo>
-                    <a:pt x="878455" y="1635841"/>
-                  </a:lnTo>
-                  <a:lnTo>
-                    <a:pt x="954924" y="1730479"/>
-                  </a:lnTo>
-                  <a:lnTo>
-                    <a:pt x="1031392" y="1819433"/>
-                  </a:lnTo>
-                  <a:lnTo>
-                    <a:pt x="1107861" y="1903043"/>
-                  </a:lnTo>
-                  <a:lnTo>
-                    <a:pt x="1184329" y="1981632"/>
-                  </a:lnTo>
-                  <a:lnTo>
-                    <a:pt x="1260798" y="2055500"/>
-                  </a:lnTo>
-                  <a:lnTo>
-                    <a:pt x="1337266" y="2124931"/>
-                  </a:lnTo>
-                  <a:lnTo>
-                    <a:pt x="1413734" y="2190192"/>
-                  </a:lnTo>
-                  <a:lnTo>
-                    <a:pt x="1490203" y="2251533"/>
-                  </a:lnTo>
-                  <a:lnTo>
-                    <a:pt x="1566671" y="2309189"/>
-                  </a:lnTo>
-                  <a:lnTo>
-                    <a:pt x="1643140" y="2363383"/>
-                  </a:lnTo>
-                  <a:lnTo>
-                    <a:pt x="1719608" y="2414321"/>
-                  </a:lnTo>
-                  <a:lnTo>
-                    <a:pt x="1796077" y="2443895"/>
-                  </a:lnTo>
-                  <a:lnTo>
-                    <a:pt x="1872545" y="2434944"/>
-                  </a:lnTo>
-                  <a:lnTo>
-                    <a:pt x="1949013" y="2425889"/>
-                  </a:lnTo>
-                  <a:lnTo>
-                    <a:pt x="2025482" y="2416728"/>
-                  </a:lnTo>
-                  <a:lnTo>
-                    <a:pt x="2101950" y="2407460"/>
-                  </a:lnTo>
-                  <a:lnTo>
-                    <a:pt x="2178419" y="2398084"/>
-                  </a:lnTo>
-                  <a:lnTo>
-                    <a:pt x="2254887" y="2388599"/>
-                  </a:lnTo>
-                  <a:lnTo>
-                    <a:pt x="2331356" y="2379003"/>
-                  </a:lnTo>
-                  <a:lnTo>
-                    <a:pt x="2407824" y="2369296"/>
-                  </a:lnTo>
-                  <a:lnTo>
-                    <a:pt x="2484292" y="2359475"/>
-                  </a:lnTo>
-                  <a:lnTo>
-                    <a:pt x="2560761" y="2349539"/>
-                  </a:lnTo>
-                  <a:lnTo>
-                    <a:pt x="2637229" y="2339488"/>
-                  </a:lnTo>
-                  <a:lnTo>
-                    <a:pt x="2713698" y="2329319"/>
-                  </a:lnTo>
-                  <a:lnTo>
-                    <a:pt x="2790166" y="2319032"/>
-                  </a:lnTo>
-                  <a:lnTo>
-                    <a:pt x="2866635" y="2308625"/>
-                  </a:lnTo>
-                  <a:lnTo>
-                    <a:pt x="2943103" y="2298097"/>
-                  </a:lnTo>
-                  <a:lnTo>
-                    <a:pt x="3019571" y="2287446"/>
-                  </a:lnTo>
-                  <a:lnTo>
-                    <a:pt x="3096040" y="2276670"/>
-                  </a:lnTo>
-                  <a:lnTo>
-                    <a:pt x="3172508" y="2265769"/>
-                  </a:lnTo>
-                  <a:lnTo>
-                    <a:pt x="3248977" y="2254741"/>
-                  </a:lnTo>
-                  <a:lnTo>
-                    <a:pt x="3325445" y="2243584"/>
-                  </a:lnTo>
-                  <a:lnTo>
-                    <a:pt x="3401914" y="2232297"/>
-                  </a:lnTo>
-                  <a:lnTo>
-                    <a:pt x="3478382" y="2220878"/>
-                  </a:lnTo>
-                  <a:lnTo>
-                    <a:pt x="3554851" y="2209327"/>
-                  </a:lnTo>
-                  <a:lnTo>
-                    <a:pt x="3631319" y="2197640"/>
-                  </a:lnTo>
-                  <a:lnTo>
-                    <a:pt x="3707787" y="2185817"/>
-                  </a:lnTo>
-                  <a:lnTo>
-                    <a:pt x="3784256" y="2173857"/>
-                  </a:lnTo>
-                  <a:lnTo>
-                    <a:pt x="3860724" y="2161757"/>
-                  </a:lnTo>
-                  <a:lnTo>
-                    <a:pt x="3937193" y="2149516"/>
-                  </a:lnTo>
-                  <a:lnTo>
-                    <a:pt x="4013661" y="2137132"/>
-                  </a:lnTo>
-                  <a:lnTo>
-                    <a:pt x="4090130" y="2124603"/>
-                  </a:lnTo>
-                  <a:lnTo>
-                    <a:pt x="4166598" y="2111929"/>
-                  </a:lnTo>
-                  <a:lnTo>
-                    <a:pt x="4243066" y="2099106"/>
-                  </a:lnTo>
-                  <a:lnTo>
-                    <a:pt x="4319535" y="2086135"/>
-                  </a:lnTo>
-                  <a:lnTo>
-                    <a:pt x="4396003" y="2073011"/>
-                  </a:lnTo>
-                  <a:lnTo>
-                    <a:pt x="4472472" y="2059735"/>
-                  </a:lnTo>
-                  <a:lnTo>
-                    <a:pt x="4548940" y="2046304"/>
-                  </a:lnTo>
-                  <a:lnTo>
-                    <a:pt x="4625409" y="2032717"/>
-                  </a:lnTo>
-                  <a:lnTo>
-                    <a:pt x="4701877" y="2018971"/>
-                  </a:lnTo>
-                  <a:lnTo>
-                    <a:pt x="4778345" y="2005064"/>
-                  </a:lnTo>
-                  <a:lnTo>
-                    <a:pt x="4854814" y="1990996"/>
-                  </a:lnTo>
-                  <a:lnTo>
-                    <a:pt x="4931282" y="1976763"/>
-                  </a:lnTo>
-                  <a:lnTo>
-                    <a:pt x="5007751" y="1962365"/>
-                  </a:lnTo>
-                  <a:lnTo>
-                    <a:pt x="5084219" y="1947798"/>
-                  </a:lnTo>
-                  <a:lnTo>
-                    <a:pt x="5160688" y="1933062"/>
-                  </a:lnTo>
-                  <a:lnTo>
-                    <a:pt x="5237156" y="1918154"/>
-                  </a:lnTo>
-                  <a:lnTo>
-                    <a:pt x="5313624" y="1903072"/>
-                  </a:lnTo>
-                  <a:lnTo>
-                    <a:pt x="5390093" y="1887814"/>
-                  </a:lnTo>
-                  <a:lnTo>
-                    <a:pt x="5466561" y="1872378"/>
-                  </a:lnTo>
-                  <a:lnTo>
-                    <a:pt x="5543030" y="1856762"/>
-                  </a:lnTo>
-                  <a:lnTo>
-                    <a:pt x="5619498" y="1840964"/>
-                  </a:lnTo>
-                  <a:lnTo>
-                    <a:pt x="5695967" y="1824982"/>
+                    <a:pt x="37304" y="98919"/>
+                  </a:lnTo>
+                  <a:lnTo>
+                    <a:pt x="113772" y="289510"/>
+                  </a:lnTo>
+                  <a:lnTo>
+                    <a:pt x="190241" y="468653"/>
+                  </a:lnTo>
+                  <a:lnTo>
+                    <a:pt x="266709" y="637036"/>
+                  </a:lnTo>
+                  <a:lnTo>
+                    <a:pt x="343177" y="795305"/>
+                  </a:lnTo>
+                  <a:lnTo>
+                    <a:pt x="419646" y="944068"/>
+                  </a:lnTo>
+                  <a:lnTo>
+                    <a:pt x="496114" y="1083895"/>
+                  </a:lnTo>
+                  <a:lnTo>
+                    <a:pt x="572583" y="1215324"/>
+                  </a:lnTo>
+                  <a:lnTo>
+                    <a:pt x="649051" y="1338859"/>
+                  </a:lnTo>
+                  <a:lnTo>
+                    <a:pt x="725520" y="1454973"/>
+                  </a:lnTo>
+                  <a:lnTo>
+                    <a:pt x="801988" y="1564113"/>
+                  </a:lnTo>
+                  <a:lnTo>
+                    <a:pt x="878456" y="1666698"/>
+                  </a:lnTo>
+                  <a:lnTo>
+                    <a:pt x="954925" y="1763120"/>
+                  </a:lnTo>
+                  <a:lnTo>
+                    <a:pt x="1031393" y="1853752"/>
+                  </a:lnTo>
+                  <a:lnTo>
+                    <a:pt x="1107862" y="1938939"/>
+                  </a:lnTo>
+                  <a:lnTo>
+                    <a:pt x="1184330" y="2019010"/>
+                  </a:lnTo>
+                  <a:lnTo>
+                    <a:pt x="1260799" y="2094271"/>
+                  </a:lnTo>
+                  <a:lnTo>
+                    <a:pt x="1337267" y="2165012"/>
+                  </a:lnTo>
+                  <a:lnTo>
+                    <a:pt x="1413736" y="2231504"/>
+                  </a:lnTo>
+                  <a:lnTo>
+                    <a:pt x="1490204" y="2294002"/>
+                  </a:lnTo>
+                  <a:lnTo>
+                    <a:pt x="1566672" y="2352746"/>
+                  </a:lnTo>
+                  <a:lnTo>
+                    <a:pt x="1643141" y="2407961"/>
+                  </a:lnTo>
+                  <a:lnTo>
+                    <a:pt x="1719609" y="2459860"/>
+                  </a:lnTo>
+                  <a:lnTo>
+                    <a:pt x="1796078" y="2489993"/>
+                  </a:lnTo>
+                  <a:lnTo>
+                    <a:pt x="1872546" y="2480873"/>
+                  </a:lnTo>
+                  <a:lnTo>
+                    <a:pt x="1949015" y="2471647"/>
+                  </a:lnTo>
+                  <a:lnTo>
+                    <a:pt x="2025483" y="2462313"/>
+                  </a:lnTo>
+                  <a:lnTo>
+                    <a:pt x="2101951" y="2452870"/>
+                  </a:lnTo>
+                  <a:lnTo>
+                    <a:pt x="2178420" y="2443318"/>
+                  </a:lnTo>
+                  <a:lnTo>
+                    <a:pt x="2254888" y="2433653"/>
+                  </a:lnTo>
+                  <a:lnTo>
+                    <a:pt x="2331357" y="2423877"/>
+                  </a:lnTo>
+                  <a:lnTo>
+                    <a:pt x="2407825" y="2413986"/>
+                  </a:lnTo>
+                  <a:lnTo>
+                    <a:pt x="2484294" y="2403980"/>
+                  </a:lnTo>
+                  <a:lnTo>
+                    <a:pt x="2560762" y="2393857"/>
+                  </a:lnTo>
+                  <a:lnTo>
+                    <a:pt x="2637230" y="2383616"/>
+                  </a:lnTo>
+                  <a:lnTo>
+                    <a:pt x="2713699" y="2373255"/>
+                  </a:lnTo>
+                  <a:lnTo>
+                    <a:pt x="2790167" y="2362774"/>
+                  </a:lnTo>
+                  <a:lnTo>
+                    <a:pt x="2866636" y="2352171"/>
+                  </a:lnTo>
+                  <a:lnTo>
+                    <a:pt x="2943104" y="2341444"/>
+                  </a:lnTo>
+                  <a:lnTo>
+                    <a:pt x="3019573" y="2330592"/>
+                  </a:lnTo>
+                  <a:lnTo>
+                    <a:pt x="3096041" y="2319613"/>
+                  </a:lnTo>
+                  <a:lnTo>
+                    <a:pt x="3172509" y="2308506"/>
+                  </a:lnTo>
+                  <a:lnTo>
+                    <a:pt x="3248978" y="2297270"/>
+                  </a:lnTo>
+                  <a:lnTo>
+                    <a:pt x="3325446" y="2285903"/>
+                  </a:lnTo>
+                  <a:lnTo>
+                    <a:pt x="3401915" y="2274403"/>
+                  </a:lnTo>
+                  <a:lnTo>
+                    <a:pt x="3478383" y="2262769"/>
+                  </a:lnTo>
+                  <a:lnTo>
+                    <a:pt x="3554852" y="2250999"/>
+                  </a:lnTo>
+                  <a:lnTo>
+                    <a:pt x="3631320" y="2239092"/>
+                  </a:lnTo>
+                  <a:lnTo>
+                    <a:pt x="3707788" y="2227046"/>
+                  </a:lnTo>
+                  <a:lnTo>
+                    <a:pt x="3784257" y="2214860"/>
+                  </a:lnTo>
+                  <a:lnTo>
+                    <a:pt x="3860725" y="2202532"/>
+                  </a:lnTo>
+                  <a:lnTo>
+                    <a:pt x="3937194" y="2190060"/>
+                  </a:lnTo>
+                  <a:lnTo>
+                    <a:pt x="4013662" y="2177442"/>
+                  </a:lnTo>
+                  <a:lnTo>
+                    <a:pt x="4090131" y="2164677"/>
+                  </a:lnTo>
+                  <a:lnTo>
+                    <a:pt x="4166599" y="2151764"/>
+                  </a:lnTo>
+                  <a:lnTo>
+                    <a:pt x="4243068" y="2138700"/>
+                  </a:lnTo>
+                  <a:lnTo>
+                    <a:pt x="4319536" y="2125483"/>
+                  </a:lnTo>
+                  <a:lnTo>
+                    <a:pt x="4396004" y="2112113"/>
+                  </a:lnTo>
+                  <a:lnTo>
+                    <a:pt x="4472473" y="2098586"/>
+                  </a:lnTo>
+                  <a:lnTo>
+                    <a:pt x="4548941" y="2084902"/>
+                  </a:lnTo>
+                  <a:lnTo>
+                    <a:pt x="4625410" y="2071058"/>
+                  </a:lnTo>
+                  <a:lnTo>
+                    <a:pt x="4701878" y="2057052"/>
+                  </a:lnTo>
+                  <a:lnTo>
+                    <a:pt x="4778347" y="2042884"/>
+                  </a:lnTo>
+                  <a:lnTo>
+                    <a:pt x="4854815" y="2028550"/>
+                  </a:lnTo>
+                  <a:lnTo>
+                    <a:pt x="4931283" y="2014049"/>
+                  </a:lnTo>
+                  <a:lnTo>
+                    <a:pt x="5007752" y="1999379"/>
+                  </a:lnTo>
+                  <a:lnTo>
+                    <a:pt x="5084220" y="1984537"/>
+                  </a:lnTo>
+                  <a:lnTo>
+                    <a:pt x="5160689" y="1969523"/>
+                  </a:lnTo>
+                  <a:lnTo>
+                    <a:pt x="5237157" y="1954333"/>
+                  </a:lnTo>
+                  <a:lnTo>
+                    <a:pt x="5313626" y="1938967"/>
+                  </a:lnTo>
+                  <a:lnTo>
+                    <a:pt x="5390094" y="1923421"/>
+                  </a:lnTo>
+                  <a:lnTo>
+                    <a:pt x="5466562" y="1907694"/>
+                  </a:lnTo>
+                  <a:lnTo>
+                    <a:pt x="5543031" y="1891784"/>
+                  </a:lnTo>
+                  <a:lnTo>
+                    <a:pt x="5619499" y="1875688"/>
+                  </a:lnTo>
+                  <a:lnTo>
+                    <a:pt x="5695968" y="1859404"/>
                   </a:lnTo>
                 </a:path>
               </a:pathLst>
@@ -3796,306 +4183,306 @@
         </p:sp>
         <p:sp>
           <p:nvSpPr>
-            <p:cNvPr id="23" name="pl23"/>
+            <p:cNvPr id="32" name="pl32"/>
             <p:cNvSpPr/>
             <p:nvPr/>
           </p:nvSpPr>
           <p:spPr>
             <a:xfrm>
-              <a:off x="915645" y="4661912"/>
-              <a:ext cx="7260303" cy="726882"/>
+              <a:off x="915645" y="4684494"/>
+              <a:ext cx="7260303" cy="740592"/>
             </a:xfrm>
             <a:custGeom>
               <a:avLst/>
               <a:pathLst>
-                <a:path w="7260303" h="726882">
+                <a:path w="7260303" h="740592">
                   <a:moveTo>
-                    <a:pt x="7260303" y="726882"/>
+                    <a:pt x="7260303" y="740592"/>
                   </a:moveTo>
                   <a:lnTo>
-                    <a:pt x="7183835" y="724849"/>
-                  </a:lnTo>
-                  <a:lnTo>
-                    <a:pt x="7107366" y="722686"/>
-                  </a:lnTo>
-                  <a:lnTo>
-                    <a:pt x="7030898" y="720385"/>
-                  </a:lnTo>
-                  <a:lnTo>
-                    <a:pt x="6954429" y="717937"/>
-                  </a:lnTo>
-                  <a:lnTo>
-                    <a:pt x="6877961" y="715332"/>
-                  </a:lnTo>
-                  <a:lnTo>
-                    <a:pt x="6801492" y="712561"/>
-                  </a:lnTo>
-                  <a:lnTo>
-                    <a:pt x="6725024" y="709613"/>
-                  </a:lnTo>
-                  <a:lnTo>
-                    <a:pt x="6648556" y="706476"/>
-                  </a:lnTo>
-                  <a:lnTo>
-                    <a:pt x="6572087" y="703139"/>
-                  </a:lnTo>
-                  <a:lnTo>
-                    <a:pt x="6495619" y="699589"/>
-                  </a:lnTo>
-                  <a:lnTo>
-                    <a:pt x="6419150" y="695812"/>
-                  </a:lnTo>
-                  <a:lnTo>
-                    <a:pt x="6342682" y="691793"/>
-                  </a:lnTo>
-                  <a:lnTo>
-                    <a:pt x="6266213" y="687518"/>
-                  </a:lnTo>
-                  <a:lnTo>
-                    <a:pt x="6189745" y="682970"/>
-                  </a:lnTo>
-                  <a:lnTo>
-                    <a:pt x="6113277" y="678131"/>
-                  </a:lnTo>
-                  <a:lnTo>
-                    <a:pt x="6036808" y="672982"/>
-                  </a:lnTo>
-                  <a:lnTo>
-                    <a:pt x="5960340" y="667505"/>
-                  </a:lnTo>
-                  <a:lnTo>
-                    <a:pt x="5883871" y="661677"/>
-                  </a:lnTo>
-                  <a:lnTo>
-                    <a:pt x="5807403" y="655478"/>
-                  </a:lnTo>
-                  <a:lnTo>
-                    <a:pt x="5730934" y="648882"/>
-                  </a:lnTo>
-                  <a:lnTo>
-                    <a:pt x="5654466" y="641864"/>
-                  </a:lnTo>
-                  <a:lnTo>
-                    <a:pt x="5577998" y="634398"/>
-                  </a:lnTo>
-                  <a:lnTo>
-                    <a:pt x="5501529" y="626456"/>
-                  </a:lnTo>
-                  <a:lnTo>
-                    <a:pt x="5425061" y="618005"/>
-                  </a:lnTo>
-                  <a:lnTo>
-                    <a:pt x="5348592" y="609014"/>
-                  </a:lnTo>
-                  <a:lnTo>
-                    <a:pt x="5272124" y="599449"/>
-                  </a:lnTo>
-                  <a:lnTo>
-                    <a:pt x="5195655" y="589273"/>
-                  </a:lnTo>
-                  <a:lnTo>
-                    <a:pt x="5119187" y="578446"/>
-                  </a:lnTo>
-                  <a:lnTo>
-                    <a:pt x="5042719" y="566928"/>
-                  </a:lnTo>
-                  <a:lnTo>
-                    <a:pt x="4966250" y="554673"/>
-                  </a:lnTo>
-                  <a:lnTo>
-                    <a:pt x="4889782" y="541636"/>
-                  </a:lnTo>
-                  <a:lnTo>
-                    <a:pt x="4813313" y="527765"/>
-                  </a:lnTo>
-                  <a:lnTo>
-                    <a:pt x="4736845" y="513008"/>
-                  </a:lnTo>
-                  <a:lnTo>
-                    <a:pt x="4660376" y="497308"/>
-                  </a:lnTo>
-                  <a:lnTo>
-                    <a:pt x="4583908" y="480604"/>
-                  </a:lnTo>
-                  <a:lnTo>
-                    <a:pt x="4507439" y="462833"/>
-                  </a:lnTo>
-                  <a:lnTo>
-                    <a:pt x="4430971" y="443927"/>
-                  </a:lnTo>
-                  <a:lnTo>
-                    <a:pt x="4354503" y="423812"/>
-                  </a:lnTo>
-                  <a:lnTo>
-                    <a:pt x="4278034" y="402412"/>
-                  </a:lnTo>
-                  <a:lnTo>
-                    <a:pt x="4201566" y="379644"/>
-                  </a:lnTo>
-                  <a:lnTo>
-                    <a:pt x="4125097" y="355422"/>
-                  </a:lnTo>
-                  <a:lnTo>
-                    <a:pt x="4048629" y="329651"/>
-                  </a:lnTo>
-                  <a:lnTo>
-                    <a:pt x="3972160" y="302234"/>
-                  </a:lnTo>
-                  <a:lnTo>
-                    <a:pt x="3895692" y="273065"/>
-                  </a:lnTo>
-                  <a:lnTo>
-                    <a:pt x="3819224" y="242031"/>
-                  </a:lnTo>
-                  <a:lnTo>
-                    <a:pt x="3742755" y="209015"/>
-                  </a:lnTo>
-                  <a:lnTo>
-                    <a:pt x="3666287" y="173889"/>
-                  </a:lnTo>
-                  <a:lnTo>
-                    <a:pt x="3589818" y="136518"/>
-                  </a:lnTo>
-                  <a:lnTo>
-                    <a:pt x="3513350" y="96759"/>
-                  </a:lnTo>
-                  <a:lnTo>
-                    <a:pt x="3436881" y="54459"/>
-                  </a:lnTo>
-                  <a:lnTo>
-                    <a:pt x="3360413" y="9456"/>
+                    <a:pt x="7183835" y="738521"/>
+                  </a:lnTo>
+                  <a:lnTo>
+                    <a:pt x="7107366" y="736317"/>
+                  </a:lnTo>
+                  <a:lnTo>
+                    <a:pt x="7030898" y="733973"/>
+                  </a:lnTo>
+                  <a:lnTo>
+                    <a:pt x="6954429" y="731478"/>
+                  </a:lnTo>
+                  <a:lnTo>
+                    <a:pt x="6877961" y="728825"/>
+                  </a:lnTo>
+                  <a:lnTo>
+                    <a:pt x="6801492" y="726001"/>
+                  </a:lnTo>
+                  <a:lnTo>
+                    <a:pt x="6725024" y="722997"/>
+                  </a:lnTo>
+                  <a:lnTo>
+                    <a:pt x="6648556" y="719802"/>
+                  </a:lnTo>
+                  <a:lnTo>
+                    <a:pt x="6572087" y="716402"/>
+                  </a:lnTo>
+                  <a:lnTo>
+                    <a:pt x="6495619" y="712785"/>
+                  </a:lnTo>
+                  <a:lnTo>
+                    <a:pt x="6419150" y="708936"/>
+                  </a:lnTo>
+                  <a:lnTo>
+                    <a:pt x="6342682" y="704842"/>
+                  </a:lnTo>
+                  <a:lnTo>
+                    <a:pt x="6266213" y="700486"/>
+                  </a:lnTo>
+                  <a:lnTo>
+                    <a:pt x="6189745" y="695852"/>
+                  </a:lnTo>
+                  <a:lnTo>
+                    <a:pt x="6113277" y="690921"/>
+                  </a:lnTo>
+                  <a:lnTo>
+                    <a:pt x="6036808" y="685676"/>
+                  </a:lnTo>
+                  <a:lnTo>
+                    <a:pt x="5960340" y="680095"/>
+                  </a:lnTo>
+                  <a:lnTo>
+                    <a:pt x="5883871" y="674158"/>
+                  </a:lnTo>
+                  <a:lnTo>
+                    <a:pt x="5807403" y="667841"/>
+                  </a:lnTo>
+                  <a:lnTo>
+                    <a:pt x="5730934" y="661121"/>
+                  </a:lnTo>
+                  <a:lnTo>
+                    <a:pt x="5654466" y="653971"/>
+                  </a:lnTo>
+                  <a:lnTo>
+                    <a:pt x="5577998" y="646365"/>
+                  </a:lnTo>
+                  <a:lnTo>
+                    <a:pt x="5501529" y="638272"/>
+                  </a:lnTo>
+                  <a:lnTo>
+                    <a:pt x="5425061" y="629662"/>
+                  </a:lnTo>
+                  <a:lnTo>
+                    <a:pt x="5348592" y="620502"/>
+                  </a:lnTo>
+                  <a:lnTo>
+                    <a:pt x="5272124" y="610756"/>
+                  </a:lnTo>
+                  <a:lnTo>
+                    <a:pt x="5195655" y="600388"/>
+                  </a:lnTo>
+                  <a:lnTo>
+                    <a:pt x="5119187" y="589357"/>
+                  </a:lnTo>
+                  <a:lnTo>
+                    <a:pt x="5042719" y="577621"/>
+                  </a:lnTo>
+                  <a:lnTo>
+                    <a:pt x="4966250" y="565136"/>
+                  </a:lnTo>
+                  <a:lnTo>
+                    <a:pt x="4889782" y="551852"/>
+                  </a:lnTo>
+                  <a:lnTo>
+                    <a:pt x="4813313" y="537720"/>
+                  </a:lnTo>
+                  <a:lnTo>
+                    <a:pt x="4736845" y="522684"/>
+                  </a:lnTo>
+                  <a:lnTo>
+                    <a:pt x="4660376" y="506688"/>
+                  </a:lnTo>
+                  <a:lnTo>
+                    <a:pt x="4583908" y="489669"/>
+                  </a:lnTo>
+                  <a:lnTo>
+                    <a:pt x="4507439" y="471563"/>
+                  </a:lnTo>
+                  <a:lnTo>
+                    <a:pt x="4430971" y="452300"/>
+                  </a:lnTo>
+                  <a:lnTo>
+                    <a:pt x="4354503" y="431806"/>
+                  </a:lnTo>
+                  <a:lnTo>
+                    <a:pt x="4278034" y="410002"/>
+                  </a:lnTo>
+                  <a:lnTo>
+                    <a:pt x="4201566" y="386805"/>
+                  </a:lnTo>
+                  <a:lnTo>
+                    <a:pt x="4125097" y="362126"/>
+                  </a:lnTo>
+                  <a:lnTo>
+                    <a:pt x="4048629" y="335869"/>
+                  </a:lnTo>
+                  <a:lnTo>
+                    <a:pt x="3972160" y="307935"/>
+                  </a:lnTo>
+                  <a:lnTo>
+                    <a:pt x="3895692" y="278215"/>
+                  </a:lnTo>
+                  <a:lnTo>
+                    <a:pt x="3819224" y="246597"/>
+                  </a:lnTo>
+                  <a:lnTo>
+                    <a:pt x="3742755" y="212957"/>
+                  </a:lnTo>
+                  <a:lnTo>
+                    <a:pt x="3666287" y="177169"/>
+                  </a:lnTo>
+                  <a:lnTo>
+                    <a:pt x="3589818" y="139093"/>
+                  </a:lnTo>
+                  <a:lnTo>
+                    <a:pt x="3513350" y="98584"/>
+                  </a:lnTo>
+                  <a:lnTo>
+                    <a:pt x="3436881" y="55486"/>
+                  </a:lnTo>
+                  <a:lnTo>
+                    <a:pt x="3360413" y="9634"/>
                   </a:lnTo>
                   <a:lnTo>
                     <a:pt x="3283945" y="0"/>
                   </a:lnTo>
                   <a:lnTo>
-                    <a:pt x="3207476" y="8745"/>
-                  </a:lnTo>
-                  <a:lnTo>
-                    <a:pt x="3131008" y="17390"/>
-                  </a:lnTo>
-                  <a:lnTo>
-                    <a:pt x="3054539" y="25936"/>
-                  </a:lnTo>
-                  <a:lnTo>
-                    <a:pt x="2978071" y="34382"/>
-                  </a:lnTo>
-                  <a:lnTo>
-                    <a:pt x="2901602" y="42732"/>
-                  </a:lnTo>
-                  <a:lnTo>
-                    <a:pt x="2825134" y="50985"/>
-                  </a:lnTo>
-                  <a:lnTo>
-                    <a:pt x="2748666" y="59143"/>
-                  </a:lnTo>
-                  <a:lnTo>
-                    <a:pt x="2672197" y="67207"/>
-                  </a:lnTo>
-                  <a:lnTo>
-                    <a:pt x="2595729" y="75178"/>
-                  </a:lnTo>
-                  <a:lnTo>
-                    <a:pt x="2519260" y="83057"/>
-                  </a:lnTo>
-                  <a:lnTo>
-                    <a:pt x="2442792" y="90846"/>
-                  </a:lnTo>
-                  <a:lnTo>
-                    <a:pt x="2366323" y="98544"/>
-                  </a:lnTo>
-                  <a:lnTo>
-                    <a:pt x="2289855" y="106154"/>
-                  </a:lnTo>
-                  <a:lnTo>
-                    <a:pt x="2213386" y="113676"/>
-                  </a:lnTo>
-                  <a:lnTo>
-                    <a:pt x="2136918" y="121112"/>
-                  </a:lnTo>
-                  <a:lnTo>
-                    <a:pt x="2060450" y="128461"/>
-                  </a:lnTo>
-                  <a:lnTo>
-                    <a:pt x="1983981" y="135726"/>
-                  </a:lnTo>
-                  <a:lnTo>
-                    <a:pt x="1907513" y="142907"/>
-                  </a:lnTo>
-                  <a:lnTo>
-                    <a:pt x="1831044" y="150006"/>
-                  </a:lnTo>
-                  <a:lnTo>
-                    <a:pt x="1754576" y="157022"/>
-                  </a:lnTo>
-                  <a:lnTo>
-                    <a:pt x="1678107" y="163958"/>
-                  </a:lnTo>
-                  <a:lnTo>
-                    <a:pt x="1601639" y="170814"/>
-                  </a:lnTo>
-                  <a:lnTo>
-                    <a:pt x="1525171" y="177591"/>
-                  </a:lnTo>
-                  <a:lnTo>
-                    <a:pt x="1448702" y="184289"/>
-                  </a:lnTo>
-                  <a:lnTo>
-                    <a:pt x="1372234" y="190911"/>
-                  </a:lnTo>
-                  <a:lnTo>
-                    <a:pt x="1295765" y="197456"/>
-                  </a:lnTo>
-                  <a:lnTo>
-                    <a:pt x="1219297" y="203925"/>
-                  </a:lnTo>
-                  <a:lnTo>
-                    <a:pt x="1142828" y="210320"/>
-                  </a:lnTo>
-                  <a:lnTo>
-                    <a:pt x="1066360" y="216642"/>
-                  </a:lnTo>
-                  <a:lnTo>
-                    <a:pt x="989892" y="222890"/>
-                  </a:lnTo>
-                  <a:lnTo>
-                    <a:pt x="913423" y="229067"/>
-                  </a:lnTo>
-                  <a:lnTo>
-                    <a:pt x="836955" y="235172"/>
-                  </a:lnTo>
-                  <a:lnTo>
-                    <a:pt x="760486" y="241207"/>
-                  </a:lnTo>
-                  <a:lnTo>
-                    <a:pt x="684018" y="247172"/>
-                  </a:lnTo>
-                  <a:lnTo>
-                    <a:pt x="607549" y="253069"/>
-                  </a:lnTo>
-                  <a:lnTo>
-                    <a:pt x="531081" y="258897"/>
-                  </a:lnTo>
-                  <a:lnTo>
-                    <a:pt x="454613" y="264659"/>
-                  </a:lnTo>
-                  <a:lnTo>
-                    <a:pt x="378144" y="270354"/>
-                  </a:lnTo>
-                  <a:lnTo>
-                    <a:pt x="301676" y="275983"/>
-                  </a:lnTo>
-                  <a:lnTo>
-                    <a:pt x="225207" y="281547"/>
-                  </a:lnTo>
-                  <a:lnTo>
-                    <a:pt x="148739" y="287048"/>
-                  </a:lnTo>
-                  <a:lnTo>
-                    <a:pt x="72270" y="292484"/>
-                  </a:lnTo>
-                  <a:lnTo>
-                    <a:pt x="0" y="297564"/>
+                    <a:pt x="3207476" y="8910"/>
+                  </a:lnTo>
+                  <a:lnTo>
+                    <a:pt x="3131008" y="17718"/>
+                  </a:lnTo>
+                  <a:lnTo>
+                    <a:pt x="3054539" y="26425"/>
+                  </a:lnTo>
+                  <a:lnTo>
+                    <a:pt x="2978071" y="35031"/>
+                  </a:lnTo>
+                  <a:lnTo>
+                    <a:pt x="2901602" y="43538"/>
+                  </a:lnTo>
+                  <a:lnTo>
+                    <a:pt x="2825134" y="51947"/>
+                  </a:lnTo>
+                  <a:lnTo>
+                    <a:pt x="2748666" y="60259"/>
+                  </a:lnTo>
+                  <a:lnTo>
+                    <a:pt x="2672197" y="68475"/>
+                  </a:lnTo>
+                  <a:lnTo>
+                    <a:pt x="2595729" y="76596"/>
+                  </a:lnTo>
+                  <a:lnTo>
+                    <a:pt x="2519260" y="84624"/>
+                  </a:lnTo>
+                  <a:lnTo>
+                    <a:pt x="2442792" y="92559"/>
+                  </a:lnTo>
+                  <a:lnTo>
+                    <a:pt x="2366323" y="100403"/>
+                  </a:lnTo>
+                  <a:lnTo>
+                    <a:pt x="2289855" y="108156"/>
+                  </a:lnTo>
+                  <a:lnTo>
+                    <a:pt x="2213386" y="115820"/>
+                  </a:lnTo>
+                  <a:lnTo>
+                    <a:pt x="2136918" y="123396"/>
+                  </a:lnTo>
+                  <a:lnTo>
+                    <a:pt x="2060450" y="130884"/>
+                  </a:lnTo>
+                  <a:lnTo>
+                    <a:pt x="1983981" y="138286"/>
+                  </a:lnTo>
+                  <a:lnTo>
+                    <a:pt x="1907513" y="145603"/>
+                  </a:lnTo>
+                  <a:lnTo>
+                    <a:pt x="1831044" y="152835"/>
+                  </a:lnTo>
+                  <a:lnTo>
+                    <a:pt x="1754576" y="159984"/>
+                  </a:lnTo>
+                  <a:lnTo>
+                    <a:pt x="1678107" y="167051"/>
+                  </a:lnTo>
+                  <a:lnTo>
+                    <a:pt x="1601639" y="174036"/>
+                  </a:lnTo>
+                  <a:lnTo>
+                    <a:pt x="1525171" y="180941"/>
+                  </a:lnTo>
+                  <a:lnTo>
+                    <a:pt x="1448702" y="187766"/>
+                  </a:lnTo>
+                  <a:lnTo>
+                    <a:pt x="1372234" y="194512"/>
+                  </a:lnTo>
+                  <a:lnTo>
+                    <a:pt x="1295765" y="201180"/>
+                  </a:lnTo>
+                  <a:lnTo>
+                    <a:pt x="1219297" y="207772"/>
+                  </a:lnTo>
+                  <a:lnTo>
+                    <a:pt x="1142828" y="214288"/>
+                  </a:lnTo>
+                  <a:lnTo>
+                    <a:pt x="1066360" y="220728"/>
+                  </a:lnTo>
+                  <a:lnTo>
+                    <a:pt x="989892" y="227095"/>
+                  </a:lnTo>
+                  <a:lnTo>
+                    <a:pt x="913423" y="233388"/>
+                  </a:lnTo>
+                  <a:lnTo>
+                    <a:pt x="836955" y="239608"/>
+                  </a:lnTo>
+                  <a:lnTo>
+                    <a:pt x="760486" y="245757"/>
+                  </a:lnTo>
+                  <a:lnTo>
+                    <a:pt x="684018" y="251835"/>
+                  </a:lnTo>
+                  <a:lnTo>
+                    <a:pt x="607549" y="257842"/>
+                  </a:lnTo>
+                  <a:lnTo>
+                    <a:pt x="531081" y="263781"/>
+                  </a:lnTo>
+                  <a:lnTo>
+                    <a:pt x="454613" y="269651"/>
+                  </a:lnTo>
+                  <a:lnTo>
+                    <a:pt x="378144" y="275453"/>
+                  </a:lnTo>
+                  <a:lnTo>
+                    <a:pt x="301676" y="281189"/>
+                  </a:lnTo>
+                  <a:lnTo>
+                    <a:pt x="225207" y="286858"/>
+                  </a:lnTo>
+                  <a:lnTo>
+                    <a:pt x="148739" y="292462"/>
+                  </a:lnTo>
+                  <a:lnTo>
+                    <a:pt x="72270" y="298002"/>
+                  </a:lnTo>
+                  <a:lnTo>
+                    <a:pt x="0" y="303177"/>
                   </a:lnTo>
                 </a:path>
               </a:pathLst>
@@ -4109,306 +4496,306 @@
         </p:sp>
         <p:sp>
           <p:nvSpPr>
-            <p:cNvPr id="24" name="pl24"/>
+            <p:cNvPr id="33" name="pl33"/>
             <p:cNvSpPr/>
             <p:nvPr/>
           </p:nvSpPr>
           <p:spPr>
             <a:xfrm>
-              <a:off x="915645" y="3127967"/>
-              <a:ext cx="7260303" cy="2082621"/>
+              <a:off x="915645" y="3121617"/>
+              <a:ext cx="7260303" cy="2121901"/>
             </a:xfrm>
             <a:custGeom>
               <a:avLst/>
               <a:pathLst>
-                <a:path w="7260303" h="2082621">
+                <a:path w="7260303" h="2121901">
                   <a:moveTo>
                     <a:pt x="0" y="0"/>
                   </a:moveTo>
                   <a:lnTo>
-                    <a:pt x="72270" y="53941"/>
-                  </a:lnTo>
-                  <a:lnTo>
-                    <a:pt x="148739" y="109597"/>
-                  </a:lnTo>
-                  <a:lnTo>
-                    <a:pt x="225207" y="163869"/>
-                  </a:lnTo>
-                  <a:lnTo>
-                    <a:pt x="301676" y="216792"/>
-                  </a:lnTo>
-                  <a:lnTo>
-                    <a:pt x="378144" y="268399"/>
-                  </a:lnTo>
-                  <a:lnTo>
-                    <a:pt x="454613" y="318723"/>
-                  </a:lnTo>
-                  <a:lnTo>
-                    <a:pt x="531081" y="367796"/>
-                  </a:lnTo>
-                  <a:lnTo>
-                    <a:pt x="607549" y="415649"/>
-                  </a:lnTo>
-                  <a:lnTo>
-                    <a:pt x="684018" y="462312"/>
-                  </a:lnTo>
-                  <a:lnTo>
-                    <a:pt x="760486" y="507816"/>
-                  </a:lnTo>
-                  <a:lnTo>
-                    <a:pt x="836955" y="552188"/>
-                  </a:lnTo>
-                  <a:lnTo>
-                    <a:pt x="913423" y="595457"/>
-                  </a:lnTo>
-                  <a:lnTo>
-                    <a:pt x="989892" y="637650"/>
-                  </a:lnTo>
-                  <a:lnTo>
-                    <a:pt x="1066360" y="678794"/>
-                  </a:lnTo>
-                  <a:lnTo>
-                    <a:pt x="1142828" y="718916"/>
-                  </a:lnTo>
-                  <a:lnTo>
-                    <a:pt x="1219297" y="758040"/>
-                  </a:lnTo>
-                  <a:lnTo>
-                    <a:pt x="1295765" y="796191"/>
-                  </a:lnTo>
-                  <a:lnTo>
-                    <a:pt x="1372234" y="833394"/>
-                  </a:lnTo>
-                  <a:lnTo>
-                    <a:pt x="1448702" y="869672"/>
-                  </a:lnTo>
-                  <a:lnTo>
-                    <a:pt x="1525171" y="905048"/>
-                  </a:lnTo>
-                  <a:lnTo>
-                    <a:pt x="1601639" y="939544"/>
-                  </a:lnTo>
-                  <a:lnTo>
-                    <a:pt x="1678107" y="973183"/>
-                  </a:lnTo>
-                  <a:lnTo>
-                    <a:pt x="1754576" y="1005986"/>
-                  </a:lnTo>
-                  <a:lnTo>
-                    <a:pt x="1831044" y="1037973"/>
-                  </a:lnTo>
-                  <a:lnTo>
-                    <a:pt x="1907513" y="1069165"/>
-                  </a:lnTo>
-                  <a:lnTo>
-                    <a:pt x="1983981" y="1099582"/>
-                  </a:lnTo>
-                  <a:lnTo>
-                    <a:pt x="2060450" y="1129242"/>
-                  </a:lnTo>
-                  <a:lnTo>
-                    <a:pt x="2136918" y="1158165"/>
-                  </a:lnTo>
-                  <a:lnTo>
-                    <a:pt x="2213386" y="1186369"/>
-                  </a:lnTo>
-                  <a:lnTo>
-                    <a:pt x="2289855" y="1213872"/>
-                  </a:lnTo>
-                  <a:lnTo>
-                    <a:pt x="2366323" y="1240691"/>
-                  </a:lnTo>
-                  <a:lnTo>
-                    <a:pt x="2442792" y="1266843"/>
-                  </a:lnTo>
-                  <a:lnTo>
-                    <a:pt x="2519260" y="1292345"/>
-                  </a:lnTo>
-                  <a:lnTo>
-                    <a:pt x="2595729" y="1317213"/>
-                  </a:lnTo>
-                  <a:lnTo>
-                    <a:pt x="2672197" y="1341463"/>
-                  </a:lnTo>
-                  <a:lnTo>
-                    <a:pt x="2748666" y="1365110"/>
-                  </a:lnTo>
-                  <a:lnTo>
-                    <a:pt x="2825134" y="1388169"/>
-                  </a:lnTo>
-                  <a:lnTo>
-                    <a:pt x="2901602" y="1410655"/>
-                  </a:lnTo>
-                  <a:lnTo>
-                    <a:pt x="2978071" y="1432582"/>
-                  </a:lnTo>
-                  <a:lnTo>
-                    <a:pt x="3054539" y="1453963"/>
-                  </a:lnTo>
-                  <a:lnTo>
-                    <a:pt x="3131008" y="1474814"/>
-                  </a:lnTo>
-                  <a:lnTo>
-                    <a:pt x="3207476" y="1495145"/>
-                  </a:lnTo>
-                  <a:lnTo>
-                    <a:pt x="3283945" y="1514972"/>
-                  </a:lnTo>
-                  <a:lnTo>
-                    <a:pt x="3360413" y="1534305"/>
-                  </a:lnTo>
-                  <a:lnTo>
-                    <a:pt x="3436881" y="1553158"/>
-                  </a:lnTo>
-                  <a:lnTo>
-                    <a:pt x="3513350" y="1571542"/>
-                  </a:lnTo>
-                  <a:lnTo>
-                    <a:pt x="3589818" y="1589469"/>
-                  </a:lnTo>
-                  <a:lnTo>
-                    <a:pt x="3666287" y="1606950"/>
-                  </a:lnTo>
-                  <a:lnTo>
-                    <a:pt x="3742755" y="1623997"/>
-                  </a:lnTo>
-                  <a:lnTo>
-                    <a:pt x="3819224" y="1640620"/>
-                  </a:lnTo>
-                  <a:lnTo>
-                    <a:pt x="3895692" y="1656830"/>
-                  </a:lnTo>
-                  <a:lnTo>
-                    <a:pt x="3972160" y="1672637"/>
-                  </a:lnTo>
-                  <a:lnTo>
-                    <a:pt x="4048629" y="1688050"/>
-                  </a:lnTo>
-                  <a:lnTo>
-                    <a:pt x="4125097" y="1703081"/>
-                  </a:lnTo>
-                  <a:lnTo>
-                    <a:pt x="4201566" y="1717738"/>
-                  </a:lnTo>
-                  <a:lnTo>
-                    <a:pt x="4278034" y="1732030"/>
-                  </a:lnTo>
-                  <a:lnTo>
-                    <a:pt x="4354503" y="1745968"/>
-                  </a:lnTo>
-                  <a:lnTo>
-                    <a:pt x="4430971" y="1759558"/>
-                  </a:lnTo>
-                  <a:lnTo>
-                    <a:pt x="4507439" y="1772811"/>
-                  </a:lnTo>
-                  <a:lnTo>
-                    <a:pt x="4583908" y="1785734"/>
-                  </a:lnTo>
-                  <a:lnTo>
-                    <a:pt x="4660376" y="1798337"/>
-                  </a:lnTo>
-                  <a:lnTo>
-                    <a:pt x="4736845" y="1810625"/>
-                  </a:lnTo>
-                  <a:lnTo>
-                    <a:pt x="4813313" y="1822609"/>
-                  </a:lnTo>
-                  <a:lnTo>
-                    <a:pt x="4889782" y="1834294"/>
-                  </a:lnTo>
-                  <a:lnTo>
-                    <a:pt x="4966250" y="1845689"/>
-                  </a:lnTo>
-                  <a:lnTo>
-                    <a:pt x="5042719" y="1856800"/>
-                  </a:lnTo>
-                  <a:lnTo>
-                    <a:pt x="5119187" y="1867636"/>
-                  </a:lnTo>
-                  <a:lnTo>
-                    <a:pt x="5195655" y="1878202"/>
-                  </a:lnTo>
-                  <a:lnTo>
-                    <a:pt x="5272124" y="1888505"/>
-                  </a:lnTo>
-                  <a:lnTo>
-                    <a:pt x="5348592" y="1898552"/>
-                  </a:lnTo>
-                  <a:lnTo>
-                    <a:pt x="5425061" y="1908349"/>
-                  </a:lnTo>
-                  <a:lnTo>
-                    <a:pt x="5501529" y="1917903"/>
-                  </a:lnTo>
-                  <a:lnTo>
-                    <a:pt x="5577998" y="1927219"/>
-                  </a:lnTo>
-                  <a:lnTo>
-                    <a:pt x="5654466" y="1936304"/>
-                  </a:lnTo>
-                  <a:lnTo>
-                    <a:pt x="5730934" y="1945163"/>
-                  </a:lnTo>
-                  <a:lnTo>
-                    <a:pt x="5807403" y="1953801"/>
-                  </a:lnTo>
-                  <a:lnTo>
-                    <a:pt x="5883871" y="1962225"/>
-                  </a:lnTo>
-                  <a:lnTo>
-                    <a:pt x="5960340" y="1970440"/>
-                  </a:lnTo>
-                  <a:lnTo>
-                    <a:pt x="6036808" y="1978450"/>
-                  </a:lnTo>
-                  <a:lnTo>
-                    <a:pt x="6113277" y="1986261"/>
-                  </a:lnTo>
-                  <a:lnTo>
-                    <a:pt x="6189745" y="1993878"/>
-                  </a:lnTo>
-                  <a:lnTo>
-                    <a:pt x="6266213" y="2001305"/>
-                  </a:lnTo>
-                  <a:lnTo>
-                    <a:pt x="6342682" y="2008548"/>
-                  </a:lnTo>
-                  <a:lnTo>
-                    <a:pt x="6419150" y="2015611"/>
-                  </a:lnTo>
-                  <a:lnTo>
-                    <a:pt x="6495619" y="2022498"/>
-                  </a:lnTo>
-                  <a:lnTo>
-                    <a:pt x="6572087" y="2029214"/>
-                  </a:lnTo>
-                  <a:lnTo>
-                    <a:pt x="6648556" y="2035763"/>
-                  </a:lnTo>
-                  <a:lnTo>
-                    <a:pt x="6725024" y="2042149"/>
-                  </a:lnTo>
-                  <a:lnTo>
-                    <a:pt x="6801492" y="2048377"/>
-                  </a:lnTo>
-                  <a:lnTo>
-                    <a:pt x="6877961" y="2054449"/>
-                  </a:lnTo>
-                  <a:lnTo>
-                    <a:pt x="6954429" y="2060371"/>
-                  </a:lnTo>
-                  <a:lnTo>
-                    <a:pt x="7030898" y="2066145"/>
-                  </a:lnTo>
-                  <a:lnTo>
-                    <a:pt x="7107366" y="2071776"/>
-                  </a:lnTo>
-                  <a:lnTo>
-                    <a:pt x="7183835" y="2077267"/>
-                  </a:lnTo>
-                  <a:lnTo>
-                    <a:pt x="7260303" y="2082621"/>
+                    <a:pt x="72270" y="54958"/>
+                  </a:lnTo>
+                  <a:lnTo>
+                    <a:pt x="148739" y="111664"/>
+                  </a:lnTo>
+                  <a:lnTo>
+                    <a:pt x="225207" y="166959"/>
+                  </a:lnTo>
+                  <a:lnTo>
+                    <a:pt x="301676" y="220880"/>
+                  </a:lnTo>
+                  <a:lnTo>
+                    <a:pt x="378144" y="273461"/>
+                  </a:lnTo>
+                  <a:lnTo>
+                    <a:pt x="454613" y="324734"/>
+                  </a:lnTo>
+                  <a:lnTo>
+                    <a:pt x="531081" y="374733"/>
+                  </a:lnTo>
+                  <a:lnTo>
+                    <a:pt x="607549" y="423488"/>
+                  </a:lnTo>
+                  <a:lnTo>
+                    <a:pt x="684018" y="471032"/>
+                  </a:lnTo>
+                  <a:lnTo>
+                    <a:pt x="760486" y="517393"/>
+                  </a:lnTo>
+                  <a:lnTo>
+                    <a:pt x="836955" y="562602"/>
+                  </a:lnTo>
+                  <a:lnTo>
+                    <a:pt x="913423" y="606687"/>
+                  </a:lnTo>
+                  <a:lnTo>
+                    <a:pt x="989892" y="649676"/>
+                  </a:lnTo>
+                  <a:lnTo>
+                    <a:pt x="1066360" y="691596"/>
+                  </a:lnTo>
+                  <a:lnTo>
+                    <a:pt x="1142828" y="732475"/>
+                  </a:lnTo>
+                  <a:lnTo>
+                    <a:pt x="1219297" y="772336"/>
+                  </a:lnTo>
+                  <a:lnTo>
+                    <a:pt x="1295765" y="811207"/>
+                  </a:lnTo>
+                  <a:lnTo>
+                    <a:pt x="1372234" y="849112"/>
+                  </a:lnTo>
+                  <a:lnTo>
+                    <a:pt x="1448702" y="886074"/>
+                  </a:lnTo>
+                  <a:lnTo>
+                    <a:pt x="1525171" y="922117"/>
+                  </a:lnTo>
+                  <a:lnTo>
+                    <a:pt x="1601639" y="957264"/>
+                  </a:lnTo>
+                  <a:lnTo>
+                    <a:pt x="1678107" y="991538"/>
+                  </a:lnTo>
+                  <a:lnTo>
+                    <a:pt x="1754576" y="1024959"/>
+                  </a:lnTo>
+                  <a:lnTo>
+                    <a:pt x="1831044" y="1057550"/>
+                  </a:lnTo>
+                  <a:lnTo>
+                    <a:pt x="1907513" y="1089330"/>
+                  </a:lnTo>
+                  <a:lnTo>
+                    <a:pt x="1983981" y="1120320"/>
+                  </a:lnTo>
+                  <a:lnTo>
+                    <a:pt x="2060450" y="1150540"/>
+                  </a:lnTo>
+                  <a:lnTo>
+                    <a:pt x="2136918" y="1180008"/>
+                  </a:lnTo>
+                  <a:lnTo>
+                    <a:pt x="2213386" y="1208744"/>
+                  </a:lnTo>
+                  <a:lnTo>
+                    <a:pt x="2289855" y="1236766"/>
+                  </a:lnTo>
+                  <a:lnTo>
+                    <a:pt x="2366323" y="1264091"/>
+                  </a:lnTo>
+                  <a:lnTo>
+                    <a:pt x="2442792" y="1290736"/>
+                  </a:lnTo>
+                  <a:lnTo>
+                    <a:pt x="2519260" y="1316719"/>
+                  </a:lnTo>
+                  <a:lnTo>
+                    <a:pt x="2595729" y="1342056"/>
+                  </a:lnTo>
+                  <a:lnTo>
+                    <a:pt x="2672197" y="1366763"/>
+                  </a:lnTo>
+                  <a:lnTo>
+                    <a:pt x="2748666" y="1390856"/>
+                  </a:lnTo>
+                  <a:lnTo>
+                    <a:pt x="2825134" y="1414350"/>
+                  </a:lnTo>
+                  <a:lnTo>
+                    <a:pt x="2901602" y="1437260"/>
+                  </a:lnTo>
+                  <a:lnTo>
+                    <a:pt x="2978071" y="1459601"/>
+                  </a:lnTo>
+                  <a:lnTo>
+                    <a:pt x="3054539" y="1481386"/>
+                  </a:lnTo>
+                  <a:lnTo>
+                    <a:pt x="3131008" y="1502629"/>
+                  </a:lnTo>
+                  <a:lnTo>
+                    <a:pt x="3207476" y="1523344"/>
+                  </a:lnTo>
+                  <a:lnTo>
+                    <a:pt x="3283945" y="1543545"/>
+                  </a:lnTo>
+                  <a:lnTo>
+                    <a:pt x="3360413" y="1563243"/>
+                  </a:lnTo>
+                  <a:lnTo>
+                    <a:pt x="3436881" y="1582451"/>
+                  </a:lnTo>
+                  <a:lnTo>
+                    <a:pt x="3513350" y="1601182"/>
+                  </a:lnTo>
+                  <a:lnTo>
+                    <a:pt x="3589818" y="1619447"/>
+                  </a:lnTo>
+                  <a:lnTo>
+                    <a:pt x="3666287" y="1637258"/>
+                  </a:lnTo>
+                  <a:lnTo>
+                    <a:pt x="3742755" y="1654627"/>
+                  </a:lnTo>
+                  <a:lnTo>
+                    <a:pt x="3819224" y="1671563"/>
+                  </a:lnTo>
+                  <a:lnTo>
+                    <a:pt x="3895692" y="1688079"/>
+                  </a:lnTo>
+                  <a:lnTo>
+                    <a:pt x="3972160" y="1704184"/>
+                  </a:lnTo>
+                  <a:lnTo>
+                    <a:pt x="4048629" y="1719888"/>
+                  </a:lnTo>
+                  <a:lnTo>
+                    <a:pt x="4125097" y="1735202"/>
+                  </a:lnTo>
+                  <a:lnTo>
+                    <a:pt x="4201566" y="1750135"/>
+                  </a:lnTo>
+                  <a:lnTo>
+                    <a:pt x="4278034" y="1764698"/>
+                  </a:lnTo>
+                  <a:lnTo>
+                    <a:pt x="4354503" y="1778898"/>
+                  </a:lnTo>
+                  <a:lnTo>
+                    <a:pt x="4430971" y="1792745"/>
+                  </a:lnTo>
+                  <a:lnTo>
+                    <a:pt x="4507439" y="1806247"/>
+                  </a:lnTo>
+                  <a:lnTo>
+                    <a:pt x="4583908" y="1819415"/>
+                  </a:lnTo>
+                  <a:lnTo>
+                    <a:pt x="4660376" y="1832254"/>
+                  </a:lnTo>
+                  <a:lnTo>
+                    <a:pt x="4736845" y="1844775"/>
+                  </a:lnTo>
+                  <a:lnTo>
+                    <a:pt x="4813313" y="1856984"/>
+                  </a:lnTo>
+                  <a:lnTo>
+                    <a:pt x="4889782" y="1868890"/>
+                  </a:lnTo>
+                  <a:lnTo>
+                    <a:pt x="4966250" y="1880500"/>
+                  </a:lnTo>
+                  <a:lnTo>
+                    <a:pt x="5042719" y="1891821"/>
+                  </a:lnTo>
+                  <a:lnTo>
+                    <a:pt x="5119187" y="1902861"/>
+                  </a:lnTo>
+                  <a:lnTo>
+                    <a:pt x="5195655" y="1913626"/>
+                  </a:lnTo>
+                  <a:lnTo>
+                    <a:pt x="5272124" y="1924123"/>
+                  </a:lnTo>
+                  <a:lnTo>
+                    <a:pt x="5348592" y="1934360"/>
+                  </a:lnTo>
+                  <a:lnTo>
+                    <a:pt x="5425061" y="1944342"/>
+                  </a:lnTo>
+                  <a:lnTo>
+                    <a:pt x="5501529" y="1954076"/>
+                  </a:lnTo>
+                  <a:lnTo>
+                    <a:pt x="5577998" y="1963568"/>
+                  </a:lnTo>
+                  <a:lnTo>
+                    <a:pt x="5654466" y="1972824"/>
+                  </a:lnTo>
+                  <a:lnTo>
+                    <a:pt x="5730934" y="1981850"/>
+                  </a:lnTo>
+                  <a:lnTo>
+                    <a:pt x="5807403" y="1990652"/>
+                  </a:lnTo>
+                  <a:lnTo>
+                    <a:pt x="5883871" y="1999234"/>
+                  </a:lnTo>
+                  <a:lnTo>
+                    <a:pt x="5960340" y="2007604"/>
+                  </a:lnTo>
+                  <a:lnTo>
+                    <a:pt x="6036808" y="2015765"/>
+                  </a:lnTo>
+                  <a:lnTo>
+                    <a:pt x="6113277" y="2023723"/>
+                  </a:lnTo>
+                  <a:lnTo>
+                    <a:pt x="6189745" y="2031484"/>
+                  </a:lnTo>
+                  <a:lnTo>
+                    <a:pt x="6266213" y="2039051"/>
+                  </a:lnTo>
+                  <a:lnTo>
+                    <a:pt x="6342682" y="2046431"/>
+                  </a:lnTo>
+                  <a:lnTo>
+                    <a:pt x="6419150" y="2053627"/>
+                  </a:lnTo>
+                  <a:lnTo>
+                    <a:pt x="6495619" y="2060644"/>
+                  </a:lnTo>
+                  <a:lnTo>
+                    <a:pt x="6572087" y="2067487"/>
+                  </a:lnTo>
+                  <a:lnTo>
+                    <a:pt x="6648556" y="2074159"/>
+                  </a:lnTo>
+                  <a:lnTo>
+                    <a:pt x="6725024" y="2080666"/>
+                  </a:lnTo>
+                  <a:lnTo>
+                    <a:pt x="6801492" y="2087011"/>
+                  </a:lnTo>
+                  <a:lnTo>
+                    <a:pt x="6877961" y="2093198"/>
+                  </a:lnTo>
+                  <a:lnTo>
+                    <a:pt x="6954429" y="2099231"/>
+                  </a:lnTo>
+                  <a:lnTo>
+                    <a:pt x="7030898" y="2105114"/>
+                  </a:lnTo>
+                  <a:lnTo>
+                    <a:pt x="7107366" y="2110851"/>
+                  </a:lnTo>
+                  <a:lnTo>
+                    <a:pt x="7183835" y="2116446"/>
+                  </a:lnTo>
+                  <a:lnTo>
+                    <a:pt x="7260303" y="2121901"/>
                   </a:lnTo>
                 </a:path>
               </a:pathLst>
@@ -4431,13 +4818,13 @@
         </p:sp>
         <p:sp>
           <p:nvSpPr>
-            <p:cNvPr id="25" name="pl25"/>
+            <p:cNvPr id="34" name="pl34"/>
             <p:cNvSpPr/>
             <p:nvPr/>
           </p:nvSpPr>
           <p:spPr>
             <a:xfrm>
-              <a:off x="915645" y="4655980"/>
+              <a:off x="915645" y="4678449"/>
               <a:ext cx="7682587" cy="0"/>
             </a:xfrm>
             <a:custGeom>
@@ -4474,21 +4861,21 @@
         </p:sp>
         <p:sp>
           <p:nvSpPr>
-            <p:cNvPr id="26" name="pl26"/>
+            <p:cNvPr id="35" name="pl35"/>
             <p:cNvSpPr/>
             <p:nvPr/>
           </p:nvSpPr>
           <p:spPr>
             <a:xfrm>
-              <a:off x="4250960" y="2209169"/>
-              <a:ext cx="0" cy="3364365"/>
+              <a:off x="4250960" y="2185486"/>
+              <a:ext cx="0" cy="3427824"/>
             </a:xfrm>
             <a:custGeom>
               <a:avLst/>
               <a:pathLst>
-                <a:path w="0" h="3364365">
+                <a:path w="0" h="3427824">
                   <a:moveTo>
-                    <a:pt x="0" y="3364365"/>
+                    <a:pt x="0" y="3427824"/>
                   </a:moveTo>
                   <a:lnTo>
                     <a:pt x="0" y="0"/>
@@ -4517,13 +4904,13 @@
         </p:sp>
         <p:sp>
           <p:nvSpPr>
-            <p:cNvPr id="27" name="tx27"/>
+            <p:cNvPr id="36" name="tx36"/>
             <p:cNvSpPr/>
             <p:nvPr/>
           </p:nvSpPr>
           <p:spPr>
             <a:xfrm>
-              <a:off x="756929" y="5369631"/>
+              <a:off x="756929" y="5406523"/>
               <a:ext cx="79004" cy="101955"/>
             </a:xfrm>
             <a:prstGeom prst="rect">
@@ -4563,13 +4950,13 @@
         </p:sp>
         <p:sp>
           <p:nvSpPr>
-            <p:cNvPr id="28" name="tx28"/>
+            <p:cNvPr id="37" name="tx37"/>
             <p:cNvSpPr/>
             <p:nvPr/>
           </p:nvSpPr>
           <p:spPr>
             <a:xfrm>
-              <a:off x="756929" y="4605002"/>
+              <a:off x="756929" y="4627472"/>
               <a:ext cx="79004" cy="101955"/>
             </a:xfrm>
             <a:prstGeom prst="rect">
@@ -4609,13 +4996,13 @@
         </p:sp>
         <p:sp>
           <p:nvSpPr>
-            <p:cNvPr id="29" name="tx29"/>
+            <p:cNvPr id="38" name="tx38"/>
             <p:cNvSpPr/>
             <p:nvPr/>
           </p:nvSpPr>
           <p:spPr>
             <a:xfrm>
-              <a:off x="756929" y="3840374"/>
+              <a:off x="756929" y="3848420"/>
               <a:ext cx="79004" cy="101955"/>
             </a:xfrm>
             <a:prstGeom prst="rect">
@@ -4655,13 +5042,13 @@
         </p:sp>
         <p:sp>
           <p:nvSpPr>
-            <p:cNvPr id="30" name="tx30"/>
+            <p:cNvPr id="39" name="tx39"/>
             <p:cNvSpPr/>
             <p:nvPr/>
           </p:nvSpPr>
           <p:spPr>
             <a:xfrm>
-              <a:off x="756929" y="3075745"/>
+              <a:off x="756929" y="3069369"/>
               <a:ext cx="79004" cy="101955"/>
             </a:xfrm>
             <a:prstGeom prst="rect">
@@ -4701,13 +5088,13 @@
         </p:sp>
         <p:sp>
           <p:nvSpPr>
-            <p:cNvPr id="31" name="tx31"/>
+            <p:cNvPr id="40" name="tx40"/>
             <p:cNvSpPr/>
             <p:nvPr/>
           </p:nvSpPr>
           <p:spPr>
             <a:xfrm>
-              <a:off x="756929" y="2311117"/>
+              <a:off x="756929" y="2290318"/>
               <a:ext cx="79004" cy="101955"/>
             </a:xfrm>
             <a:prstGeom prst="rect">
@@ -4747,14 +5134,14 @@
         </p:sp>
         <p:sp>
           <p:nvSpPr>
-            <p:cNvPr id="32" name="tx32"/>
+            <p:cNvPr id="41" name="tx41"/>
             <p:cNvSpPr/>
             <p:nvPr/>
           </p:nvSpPr>
           <p:spPr>
             <a:xfrm>
-              <a:off x="2451993" y="5653245"/>
-              <a:ext cx="244784" cy="101955"/>
+              <a:off x="1598722" y="5693022"/>
+              <a:ext cx="205282" cy="101955"/>
             </a:xfrm>
             <a:prstGeom prst="rect">
               <a:avLst/>
@@ -4786,21 +5173,21 @@
                   <a:latin typeface="Helvetica"/>
                   <a:cs typeface="Helvetica"/>
                 </a:rPr>
-                <a:t>-0.2</a:t>
+                <a:t>-30</a:t>
               </a:r>
             </a:p>
           </p:txBody>
         </p:sp>
         <p:sp>
           <p:nvSpPr>
-            <p:cNvPr id="33" name="tx33"/>
+            <p:cNvPr id="42" name="tx42"/>
             <p:cNvSpPr/>
             <p:nvPr/>
           </p:nvSpPr>
           <p:spPr>
             <a:xfrm>
-              <a:off x="4221672" y="5653245"/>
-              <a:ext cx="197510" cy="101955"/>
+              <a:off x="2471744" y="5693022"/>
+              <a:ext cx="205282" cy="101955"/>
             </a:xfrm>
             <a:prstGeom prst="rect">
               <a:avLst/>
@@ -4832,21 +5219,21 @@
                   <a:latin typeface="Helvetica"/>
                   <a:cs typeface="Helvetica"/>
                 </a:rPr>
-                <a:t>0.0</a:t>
+                <a:t>-20</a:t>
               </a:r>
             </a:p>
           </p:txBody>
         </p:sp>
         <p:sp>
           <p:nvSpPr>
-            <p:cNvPr id="34" name="tx34"/>
+            <p:cNvPr id="43" name="tx43"/>
             <p:cNvSpPr/>
             <p:nvPr/>
           </p:nvSpPr>
           <p:spPr>
             <a:xfrm>
-              <a:off x="5967715" y="5653245"/>
-              <a:ext cx="197510" cy="101955"/>
+              <a:off x="3344765" y="5693022"/>
+              <a:ext cx="205282" cy="101955"/>
             </a:xfrm>
             <a:prstGeom prst="rect">
               <a:avLst/>
@@ -4878,21 +5265,21 @@
                   <a:latin typeface="Helvetica"/>
                   <a:cs typeface="Helvetica"/>
                 </a:rPr>
-                <a:t>0.2</a:t>
+                <a:t>-10</a:t>
               </a:r>
             </a:p>
           </p:txBody>
         </p:sp>
         <p:sp>
           <p:nvSpPr>
-            <p:cNvPr id="35" name="tx35"/>
+            <p:cNvPr id="44" name="tx44"/>
             <p:cNvSpPr/>
             <p:nvPr/>
           </p:nvSpPr>
           <p:spPr>
             <a:xfrm>
-              <a:off x="7713757" y="5653245"/>
-              <a:ext cx="197510" cy="101955"/>
+              <a:off x="4280925" y="5693022"/>
+              <a:ext cx="79004" cy="101955"/>
             </a:xfrm>
             <a:prstGeom prst="rect">
               <a:avLst/>
@@ -4924,21 +5311,205 @@
                   <a:latin typeface="Helvetica"/>
                   <a:cs typeface="Helvetica"/>
                 </a:rPr>
-                <a:t>0.4</a:t>
+                <a:t>0</a:t>
               </a:r>
             </a:p>
           </p:txBody>
         </p:sp>
         <p:sp>
           <p:nvSpPr>
-            <p:cNvPr id="36" name="tx36"/>
+            <p:cNvPr id="45" name="tx45"/>
             <p:cNvSpPr/>
             <p:nvPr/>
           </p:nvSpPr>
           <p:spPr>
             <a:xfrm>
-              <a:off x="2688337" y="5834415"/>
-              <a:ext cx="2138873" cy="127558"/>
+              <a:off x="5114445" y="5693022"/>
+              <a:ext cx="158008" cy="101955"/>
+            </a:xfrm>
+            <a:prstGeom prst="rect">
+              <a:avLst/>
+            </a:prstGeom>
+            <a:noFill/>
+          </p:spPr>
+          <p:txBody>
+            <a:bodyPr lIns="0" rIns="0" tIns="0" bIns="0" anchorCtr="1" anchor="ctr" wrap="none"/>
+            <a:lstStyle/>
+            <a:p>
+              <a:pPr algn="l" marL="0" marR="0" indent="0">
+                <a:lnSpc>
+                  <a:spcPts val="1120"/>
+                </a:lnSpc>
+                <a:spcBef>
+                  <a:spcPts val="0"/>
+                </a:spcBef>
+                <a:spcAft>
+                  <a:spcPts val="0"/>
+                </a:spcAft>
+              </a:pPr>
+              <a:r>
+                <a:rPr sz="1120">
+                  <a:solidFill>
+                    <a:srgbClr val="4D4D4D">
+                      <a:alpha val="100000"/>
+                    </a:srgbClr>
+                  </a:solidFill>
+                  <a:latin typeface="Helvetica"/>
+                  <a:cs typeface="Helvetica"/>
+                </a:rPr>
+                <a:t>10</a:t>
+              </a:r>
+            </a:p>
+          </p:txBody>
+        </p:sp>
+        <p:sp>
+          <p:nvSpPr>
+            <p:cNvPr id="46" name="tx46"/>
+            <p:cNvSpPr/>
+            <p:nvPr/>
+          </p:nvSpPr>
+          <p:spPr>
+            <a:xfrm>
+              <a:off x="5987466" y="5693022"/>
+              <a:ext cx="158008" cy="101955"/>
+            </a:xfrm>
+            <a:prstGeom prst="rect">
+              <a:avLst/>
+            </a:prstGeom>
+            <a:noFill/>
+          </p:spPr>
+          <p:txBody>
+            <a:bodyPr lIns="0" rIns="0" tIns="0" bIns="0" anchorCtr="1" anchor="ctr" wrap="none"/>
+            <a:lstStyle/>
+            <a:p>
+              <a:pPr algn="l" marL="0" marR="0" indent="0">
+                <a:lnSpc>
+                  <a:spcPts val="1120"/>
+                </a:lnSpc>
+                <a:spcBef>
+                  <a:spcPts val="0"/>
+                </a:spcBef>
+                <a:spcAft>
+                  <a:spcPts val="0"/>
+                </a:spcAft>
+              </a:pPr>
+              <a:r>
+                <a:rPr sz="1120">
+                  <a:solidFill>
+                    <a:srgbClr val="4D4D4D">
+                      <a:alpha val="100000"/>
+                    </a:srgbClr>
+                  </a:solidFill>
+                  <a:latin typeface="Helvetica"/>
+                  <a:cs typeface="Helvetica"/>
+                </a:rPr>
+                <a:t>20</a:t>
+              </a:r>
+            </a:p>
+          </p:txBody>
+        </p:sp>
+        <p:sp>
+          <p:nvSpPr>
+            <p:cNvPr id="47" name="tx47"/>
+            <p:cNvSpPr/>
+            <p:nvPr/>
+          </p:nvSpPr>
+          <p:spPr>
+            <a:xfrm>
+              <a:off x="6860487" y="5693022"/>
+              <a:ext cx="158008" cy="101955"/>
+            </a:xfrm>
+            <a:prstGeom prst="rect">
+              <a:avLst/>
+            </a:prstGeom>
+            <a:noFill/>
+          </p:spPr>
+          <p:txBody>
+            <a:bodyPr lIns="0" rIns="0" tIns="0" bIns="0" anchorCtr="1" anchor="ctr" wrap="none"/>
+            <a:lstStyle/>
+            <a:p>
+              <a:pPr algn="l" marL="0" marR="0" indent="0">
+                <a:lnSpc>
+                  <a:spcPts val="1120"/>
+                </a:lnSpc>
+                <a:spcBef>
+                  <a:spcPts val="0"/>
+                </a:spcBef>
+                <a:spcAft>
+                  <a:spcPts val="0"/>
+                </a:spcAft>
+              </a:pPr>
+              <a:r>
+                <a:rPr sz="1120">
+                  <a:solidFill>
+                    <a:srgbClr val="4D4D4D">
+                      <a:alpha val="100000"/>
+                    </a:srgbClr>
+                  </a:solidFill>
+                  <a:latin typeface="Helvetica"/>
+                  <a:cs typeface="Helvetica"/>
+                </a:rPr>
+                <a:t>30</a:t>
+              </a:r>
+            </a:p>
+          </p:txBody>
+        </p:sp>
+        <p:sp>
+          <p:nvSpPr>
+            <p:cNvPr id="48" name="tx48"/>
+            <p:cNvSpPr/>
+            <p:nvPr/>
+          </p:nvSpPr>
+          <p:spPr>
+            <a:xfrm>
+              <a:off x="7733508" y="5693022"/>
+              <a:ext cx="158008" cy="101955"/>
+            </a:xfrm>
+            <a:prstGeom prst="rect">
+              <a:avLst/>
+            </a:prstGeom>
+            <a:noFill/>
+          </p:spPr>
+          <p:txBody>
+            <a:bodyPr lIns="0" rIns="0" tIns="0" bIns="0" anchorCtr="1" anchor="ctr" wrap="none"/>
+            <a:lstStyle/>
+            <a:p>
+              <a:pPr algn="l" marL="0" marR="0" indent="0">
+                <a:lnSpc>
+                  <a:spcPts val="1120"/>
+                </a:lnSpc>
+                <a:spcBef>
+                  <a:spcPts val="0"/>
+                </a:spcBef>
+                <a:spcAft>
+                  <a:spcPts val="0"/>
+                </a:spcAft>
+              </a:pPr>
+              <a:r>
+                <a:rPr sz="1120">
+                  <a:solidFill>
+                    <a:srgbClr val="4D4D4D">
+                      <a:alpha val="100000"/>
+                    </a:srgbClr>
+                  </a:solidFill>
+                  <a:latin typeface="Helvetica"/>
+                  <a:cs typeface="Helvetica"/>
+                </a:rPr>
+                <a:t>40</a:t>
+              </a:r>
+            </a:p>
+          </p:txBody>
+        </p:sp>
+        <p:sp>
+          <p:nvSpPr>
+            <p:cNvPr id="49" name="tx49"/>
+            <p:cNvSpPr/>
+            <p:nvPr/>
+          </p:nvSpPr>
+          <p:spPr>
+            <a:xfrm>
+              <a:off x="3941888" y="5870717"/>
+              <a:ext cx="1630100" cy="127558"/>
             </a:xfrm>
             <a:prstGeom prst="rect">
               <a:avLst/>
@@ -4970,572 +5541,20 @@
                   <a:latin typeface="Helvetica"/>
                   <a:cs typeface="Helvetica"/>
                 </a:rPr>
-                <a:t>eGFR difference  =  (eGFR</a:t>
+                <a:t>eGFR difference (%)</a:t>
               </a:r>
             </a:p>
           </p:txBody>
         </p:sp>
         <p:sp>
           <p:nvSpPr>
-            <p:cNvPr id="37" name="tx37"/>
-            <p:cNvSpPr/>
-            <p:nvPr/>
-          </p:nvSpPr>
-          <p:spPr>
-            <a:xfrm>
-              <a:off x="4827210" y="5905308"/>
-              <a:ext cx="89885" cy="89245"/>
-            </a:xfrm>
-            <a:prstGeom prst="rect">
-              <a:avLst/>
-            </a:prstGeom>
-            <a:noFill/>
-          </p:spPr>
-          <p:txBody>
-            <a:bodyPr lIns="0" rIns="0" tIns="0" bIns="0" anchorCtr="1" anchor="ctr" wrap="none"/>
-            <a:lstStyle/>
-            <a:p>
-              <a:pPr algn="l" marL="0" marR="0" indent="0">
-                <a:lnSpc>
-                  <a:spcPts val="979"/>
-                </a:lnSpc>
-                <a:spcBef>
-                  <a:spcPts val="0"/>
-                </a:spcBef>
-                <a:spcAft>
-                  <a:spcPts val="0"/>
-                </a:spcAft>
-              </a:pPr>
-              <a:r>
-                <a:rPr sz="979">
-                  <a:solidFill>
-                    <a:srgbClr val="000000">
-                      <a:alpha val="100000"/>
-                    </a:srgbClr>
-                  </a:solidFill>
-                  <a:latin typeface="Helvetica"/>
-                  <a:cs typeface="Helvetica"/>
-                </a:rPr>
-                <a:t>C</a:t>
-              </a:r>
-            </a:p>
-          </p:txBody>
-        </p:sp>
-        <p:sp>
-          <p:nvSpPr>
-            <p:cNvPr id="38" name="tx38"/>
-            <p:cNvSpPr/>
-            <p:nvPr/>
-          </p:nvSpPr>
-          <p:spPr>
-            <a:xfrm>
-              <a:off x="4917095" y="5905308"/>
-              <a:ext cx="89885" cy="89245"/>
-            </a:xfrm>
-            <a:prstGeom prst="rect">
-              <a:avLst/>
-            </a:prstGeom>
-            <a:noFill/>
-          </p:spPr>
-          <p:txBody>
-            <a:bodyPr lIns="0" rIns="0" tIns="0" bIns="0" anchorCtr="1" anchor="ctr" wrap="none"/>
-            <a:lstStyle/>
-            <a:p>
-              <a:pPr algn="l" marL="0" marR="0" indent="0">
-                <a:lnSpc>
-                  <a:spcPts val="979"/>
-                </a:lnSpc>
-                <a:spcBef>
-                  <a:spcPts val="0"/>
-                </a:spcBef>
-                <a:spcAft>
-                  <a:spcPts val="0"/>
-                </a:spcAft>
-              </a:pPr>
-              <a:r>
-                <a:rPr sz="979">
-                  <a:solidFill>
-                    <a:srgbClr val="000000">
-                      <a:alpha val="100000"/>
-                    </a:srgbClr>
-                  </a:solidFill>
-                  <a:latin typeface="Helvetica"/>
-                  <a:cs typeface="Helvetica"/>
-                </a:rPr>
-                <a:t>R</a:t>
-              </a:r>
-            </a:p>
-          </p:txBody>
-        </p:sp>
-        <p:sp>
-          <p:nvSpPr>
-            <p:cNvPr id="39" name="tx39"/>
-            <p:cNvSpPr/>
-            <p:nvPr/>
-          </p:nvSpPr>
-          <p:spPr>
-            <a:xfrm>
-              <a:off x="5006981" y="5884826"/>
-              <a:ext cx="68305" cy="109728"/>
-            </a:xfrm>
-            <a:prstGeom prst="rect">
-              <a:avLst/>
-            </a:prstGeom>
-            <a:noFill/>
-          </p:spPr>
-          <p:txBody>
-            <a:bodyPr lIns="0" rIns="0" tIns="0" bIns="0" anchorCtr="1" anchor="ctr" wrap="none"/>
-            <a:lstStyle/>
-            <a:p>
-              <a:pPr algn="l" marL="0" marR="0" indent="0">
-                <a:lnSpc>
-                  <a:spcPts val="979"/>
-                </a:lnSpc>
-                <a:spcBef>
-                  <a:spcPts val="0"/>
-                </a:spcBef>
-                <a:spcAft>
-                  <a:spcPts val="0"/>
-                </a:spcAft>
-              </a:pPr>
-              <a:r>
-                <a:rPr sz="979">
-                  <a:solidFill>
-                    <a:srgbClr val="000000">
-                      <a:alpha val="100000"/>
-                    </a:srgbClr>
-                  </a:solidFill>
-                  <a:latin typeface="Symbol"/>
-                  <a:cs typeface="Symbol"/>
-                </a:rPr>
-                <a:t>−</a:t>
-              </a:r>
-            </a:p>
-          </p:txBody>
-        </p:sp>
-        <p:sp>
-          <p:nvSpPr>
-            <p:cNvPr id="40" name="tx40"/>
-            <p:cNvSpPr/>
-            <p:nvPr/>
-          </p:nvSpPr>
-          <p:spPr>
-            <a:xfrm>
-              <a:off x="5075286" y="5905308"/>
-              <a:ext cx="89885" cy="89245"/>
-            </a:xfrm>
-            <a:prstGeom prst="rect">
-              <a:avLst/>
-            </a:prstGeom>
-            <a:noFill/>
-          </p:spPr>
-          <p:txBody>
-            <a:bodyPr lIns="0" rIns="0" tIns="0" bIns="0" anchorCtr="1" anchor="ctr" wrap="none"/>
-            <a:lstStyle/>
-            <a:p>
-              <a:pPr algn="l" marL="0" marR="0" indent="0">
-                <a:lnSpc>
-                  <a:spcPts val="979"/>
-                </a:lnSpc>
-                <a:spcBef>
-                  <a:spcPts val="0"/>
-                </a:spcBef>
-                <a:spcAft>
-                  <a:spcPts val="0"/>
-                </a:spcAft>
-              </a:pPr>
-              <a:r>
-                <a:rPr sz="979">
-                  <a:solidFill>
-                    <a:srgbClr val="000000">
-                      <a:alpha val="100000"/>
-                    </a:srgbClr>
-                  </a:solidFill>
-                  <a:latin typeface="Helvetica"/>
-                  <a:cs typeface="Helvetica"/>
-                </a:rPr>
-                <a:t>C</a:t>
-              </a:r>
-            </a:p>
-          </p:txBody>
-        </p:sp>
-        <p:sp>
-          <p:nvSpPr>
-            <p:cNvPr id="41" name="tx41"/>
-            <p:cNvSpPr/>
-            <p:nvPr/>
-          </p:nvSpPr>
-          <p:spPr>
-            <a:xfrm>
-              <a:off x="5165172" y="5905308"/>
-              <a:ext cx="83027" cy="89245"/>
-            </a:xfrm>
-            <a:prstGeom prst="rect">
-              <a:avLst/>
-            </a:prstGeom>
-            <a:noFill/>
-          </p:spPr>
-          <p:txBody>
-            <a:bodyPr lIns="0" rIns="0" tIns="0" bIns="0" anchorCtr="1" anchor="ctr" wrap="none"/>
-            <a:lstStyle/>
-            <a:p>
-              <a:pPr algn="l" marL="0" marR="0" indent="0">
-                <a:lnSpc>
-                  <a:spcPts val="979"/>
-                </a:lnSpc>
-                <a:spcBef>
-                  <a:spcPts val="0"/>
-                </a:spcBef>
-                <a:spcAft>
-                  <a:spcPts val="0"/>
-                </a:spcAft>
-              </a:pPr>
-              <a:r>
-                <a:rPr sz="979">
-                  <a:solidFill>
-                    <a:srgbClr val="000000">
-                      <a:alpha val="100000"/>
-                    </a:srgbClr>
-                  </a:solidFill>
-                  <a:latin typeface="Helvetica"/>
-                  <a:cs typeface="Helvetica"/>
-                </a:rPr>
-                <a:t>Y</a:t>
-              </a:r>
-            </a:p>
-          </p:txBody>
-        </p:sp>
-        <p:sp>
-          <p:nvSpPr>
-            <p:cNvPr id="42" name="tx42"/>
-            <p:cNvSpPr/>
-            <p:nvPr/>
-          </p:nvSpPr>
-          <p:spPr>
-            <a:xfrm>
-              <a:off x="5248199" y="5905308"/>
-              <a:ext cx="83027" cy="89245"/>
-            </a:xfrm>
-            <a:prstGeom prst="rect">
-              <a:avLst/>
-            </a:prstGeom>
-            <a:noFill/>
-          </p:spPr>
-          <p:txBody>
-            <a:bodyPr lIns="0" rIns="0" tIns="0" bIns="0" anchorCtr="1" anchor="ctr" wrap="none"/>
-            <a:lstStyle/>
-            <a:p>
-              <a:pPr algn="l" marL="0" marR="0" indent="0">
-                <a:lnSpc>
-                  <a:spcPts val="979"/>
-                </a:lnSpc>
-                <a:spcBef>
-                  <a:spcPts val="0"/>
-                </a:spcBef>
-                <a:spcAft>
-                  <a:spcPts val="0"/>
-                </a:spcAft>
-              </a:pPr>
-              <a:r>
-                <a:rPr sz="979">
-                  <a:solidFill>
-                    <a:srgbClr val="000000">
-                      <a:alpha val="100000"/>
-                    </a:srgbClr>
-                  </a:solidFill>
-                  <a:latin typeface="Helvetica"/>
-                  <a:cs typeface="Helvetica"/>
-                </a:rPr>
-                <a:t>S</a:t>
-              </a:r>
-            </a:p>
-          </p:txBody>
-        </p:sp>
-        <p:sp>
-          <p:nvSpPr>
-            <p:cNvPr id="43" name="tx43"/>
-            <p:cNvSpPr/>
-            <p:nvPr/>
-          </p:nvSpPr>
-          <p:spPr>
-            <a:xfrm>
-              <a:off x="5331227" y="5834415"/>
-              <a:ext cx="558149" cy="127558"/>
-            </a:xfrm>
-            <a:prstGeom prst="rect">
-              <a:avLst/>
-            </a:prstGeom>
-            <a:noFill/>
-          </p:spPr>
-          <p:txBody>
-            <a:bodyPr lIns="0" rIns="0" tIns="0" bIns="0" anchorCtr="1" anchor="ctr" wrap="none"/>
-            <a:lstStyle/>
-            <a:p>
-              <a:pPr algn="l" marL="0" marR="0" indent="0">
-                <a:lnSpc>
-                  <a:spcPts val="1400"/>
-                </a:lnSpc>
-                <a:spcBef>
-                  <a:spcPts val="0"/>
-                </a:spcBef>
-                <a:spcAft>
-                  <a:spcPts val="0"/>
-                </a:spcAft>
-              </a:pPr>
-              <a:r>
-                <a:rPr sz="1400">
-                  <a:solidFill>
-                    <a:srgbClr val="000000">
-                      <a:alpha val="100000"/>
-                    </a:srgbClr>
-                  </a:solidFill>
-                  <a:latin typeface="Helvetica"/>
-                  <a:cs typeface="Helvetica"/>
-                </a:rPr>
-                <a:t> − CrCl</a:t>
-              </a:r>
-            </a:p>
-          </p:txBody>
-        </p:sp>
-        <p:sp>
-          <p:nvSpPr>
-            <p:cNvPr id="44" name="tx44"/>
-            <p:cNvSpPr/>
-            <p:nvPr/>
-          </p:nvSpPr>
-          <p:spPr>
-            <a:xfrm>
-              <a:off x="5889377" y="5905308"/>
-              <a:ext cx="89885" cy="89245"/>
-            </a:xfrm>
-            <a:prstGeom prst="rect">
-              <a:avLst/>
-            </a:prstGeom>
-            <a:noFill/>
-          </p:spPr>
-          <p:txBody>
-            <a:bodyPr lIns="0" rIns="0" tIns="0" bIns="0" anchorCtr="1" anchor="ctr" wrap="none"/>
-            <a:lstStyle/>
-            <a:p>
-              <a:pPr algn="l" marL="0" marR="0" indent="0">
-                <a:lnSpc>
-                  <a:spcPts val="979"/>
-                </a:lnSpc>
-                <a:spcBef>
-                  <a:spcPts val="0"/>
-                </a:spcBef>
-                <a:spcAft>
-                  <a:spcPts val="0"/>
-                </a:spcAft>
-              </a:pPr>
-              <a:r>
-                <a:rPr sz="979">
-                  <a:solidFill>
-                    <a:srgbClr val="000000">
-                      <a:alpha val="100000"/>
-                    </a:srgbClr>
-                  </a:solidFill>
-                  <a:latin typeface="Helvetica"/>
-                  <a:cs typeface="Helvetica"/>
-                </a:rPr>
-                <a:t>C</a:t>
-              </a:r>
-            </a:p>
-          </p:txBody>
-        </p:sp>
-        <p:sp>
-          <p:nvSpPr>
-            <p:cNvPr id="45" name="tx45"/>
-            <p:cNvSpPr/>
-            <p:nvPr/>
-          </p:nvSpPr>
-          <p:spPr>
-            <a:xfrm>
-              <a:off x="5979262" y="5905308"/>
-              <a:ext cx="96743" cy="89245"/>
-            </a:xfrm>
-            <a:prstGeom prst="rect">
-              <a:avLst/>
-            </a:prstGeom>
-            <a:noFill/>
-          </p:spPr>
-          <p:txBody>
-            <a:bodyPr lIns="0" rIns="0" tIns="0" bIns="0" anchorCtr="1" anchor="ctr" wrap="none"/>
-            <a:lstStyle/>
-            <a:p>
-              <a:pPr algn="l" marL="0" marR="0" indent="0">
-                <a:lnSpc>
-                  <a:spcPts val="979"/>
-                </a:lnSpc>
-                <a:spcBef>
-                  <a:spcPts val="0"/>
-                </a:spcBef>
-                <a:spcAft>
-                  <a:spcPts val="0"/>
-                </a:spcAft>
-              </a:pPr>
-              <a:r>
-                <a:rPr sz="979">
-                  <a:solidFill>
-                    <a:srgbClr val="000000">
-                      <a:alpha val="100000"/>
-                    </a:srgbClr>
-                  </a:solidFill>
-                  <a:latin typeface="Helvetica"/>
-                  <a:cs typeface="Helvetica"/>
-                </a:rPr>
-                <a:t>G</a:t>
-              </a:r>
-            </a:p>
-          </p:txBody>
-        </p:sp>
-        <p:sp>
-          <p:nvSpPr>
-            <p:cNvPr id="46" name="tx46"/>
-            <p:cNvSpPr/>
-            <p:nvPr/>
-          </p:nvSpPr>
-          <p:spPr>
-            <a:xfrm>
-              <a:off x="6076006" y="5834415"/>
-              <a:ext cx="562904" cy="127558"/>
-            </a:xfrm>
-            <a:prstGeom prst="rect">
-              <a:avLst/>
-            </a:prstGeom>
-            <a:noFill/>
-          </p:spPr>
-          <p:txBody>
-            <a:bodyPr lIns="0" rIns="0" tIns="0" bIns="0" anchorCtr="1" anchor="ctr" wrap="none"/>
-            <a:lstStyle/>
-            <a:p>
-              <a:pPr algn="l" marL="0" marR="0" indent="0">
-                <a:lnSpc>
-                  <a:spcPts val="1400"/>
-                </a:lnSpc>
-                <a:spcBef>
-                  <a:spcPts val="0"/>
-                </a:spcBef>
-                <a:spcAft>
-                  <a:spcPts val="0"/>
-                </a:spcAft>
-              </a:pPr>
-              <a:r>
-                <a:rPr sz="1400">
-                  <a:solidFill>
-                    <a:srgbClr val="000000">
-                      <a:alpha val="100000"/>
-                    </a:srgbClr>
-                  </a:solidFill>
-                  <a:latin typeface="Helvetica"/>
-                  <a:cs typeface="Helvetica"/>
-                </a:rPr>
-                <a:t>) / CrCl</a:t>
-              </a:r>
-            </a:p>
-          </p:txBody>
-        </p:sp>
-        <p:sp>
-          <p:nvSpPr>
-            <p:cNvPr id="47" name="tx47"/>
-            <p:cNvSpPr/>
-            <p:nvPr/>
-          </p:nvSpPr>
-          <p:spPr>
-            <a:xfrm>
-              <a:off x="6638910" y="5905308"/>
-              <a:ext cx="89885" cy="89245"/>
-            </a:xfrm>
-            <a:prstGeom prst="rect">
-              <a:avLst/>
-            </a:prstGeom>
-            <a:noFill/>
-          </p:spPr>
-          <p:txBody>
-            <a:bodyPr lIns="0" rIns="0" tIns="0" bIns="0" anchorCtr="1" anchor="ctr" wrap="none"/>
-            <a:lstStyle/>
-            <a:p>
-              <a:pPr algn="l" marL="0" marR="0" indent="0">
-                <a:lnSpc>
-                  <a:spcPts val="979"/>
-                </a:lnSpc>
-                <a:spcBef>
-                  <a:spcPts val="0"/>
-                </a:spcBef>
-                <a:spcAft>
-                  <a:spcPts val="0"/>
-                </a:spcAft>
-              </a:pPr>
-              <a:r>
-                <a:rPr sz="979">
-                  <a:solidFill>
-                    <a:srgbClr val="000000">
-                      <a:alpha val="100000"/>
-                    </a:srgbClr>
-                  </a:solidFill>
-                  <a:latin typeface="Helvetica"/>
-                  <a:cs typeface="Helvetica"/>
-                </a:rPr>
-                <a:t>C</a:t>
-              </a:r>
-            </a:p>
-          </p:txBody>
-        </p:sp>
-        <p:sp>
-          <p:nvSpPr>
-            <p:cNvPr id="48" name="tx48"/>
-            <p:cNvSpPr/>
-            <p:nvPr/>
-          </p:nvSpPr>
-          <p:spPr>
-            <a:xfrm>
-              <a:off x="6728796" y="5905308"/>
-              <a:ext cx="96743" cy="89245"/>
-            </a:xfrm>
-            <a:prstGeom prst="rect">
-              <a:avLst/>
-            </a:prstGeom>
-            <a:noFill/>
-          </p:spPr>
-          <p:txBody>
-            <a:bodyPr lIns="0" rIns="0" tIns="0" bIns="0" anchorCtr="1" anchor="ctr" wrap="none"/>
-            <a:lstStyle/>
-            <a:p>
-              <a:pPr algn="l" marL="0" marR="0" indent="0">
-                <a:lnSpc>
-                  <a:spcPts val="979"/>
-                </a:lnSpc>
-                <a:spcBef>
-                  <a:spcPts val="0"/>
-                </a:spcBef>
-                <a:spcAft>
-                  <a:spcPts val="0"/>
-                </a:spcAft>
-              </a:pPr>
-              <a:r>
-                <a:rPr sz="979">
-                  <a:solidFill>
-                    <a:srgbClr val="000000">
-                      <a:alpha val="100000"/>
-                    </a:srgbClr>
-                  </a:solidFill>
-                  <a:latin typeface="Helvetica"/>
-                  <a:cs typeface="Helvetica"/>
-                </a:rPr>
-                <a:t>G</a:t>
-              </a:r>
-            </a:p>
-          </p:txBody>
-        </p:sp>
-        <p:sp>
-          <p:nvSpPr>
-            <p:cNvPr id="49" name="tx49"/>
+            <p:cNvPr id="50" name="tx50"/>
             <p:cNvSpPr/>
             <p:nvPr/>
           </p:nvSpPr>
           <p:spPr>
             <a:xfrm rot="-5400000">
-              <a:off x="-37527" y="3827572"/>
+              <a:off x="-37527" y="3835619"/>
               <a:ext cx="1294150" cy="127558"/>
             </a:xfrm>
             <a:prstGeom prst="rect">
@@ -5575,14 +5594,14 @@
         </p:sp>
         <p:sp>
           <p:nvSpPr>
-            <p:cNvPr id="50" name="tx50"/>
+            <p:cNvPr id="51" name="tx51"/>
             <p:cNvSpPr/>
             <p:nvPr/>
           </p:nvSpPr>
           <p:spPr>
             <a:xfrm>
               <a:off x="915645" y="1977589"/>
-              <a:ext cx="5929701" cy="109362"/>
+              <a:ext cx="3712646" cy="91165"/>
             </a:xfrm>
             <a:prstGeom prst="rect">
               <a:avLst/>
@@ -5595,7 +5614,7 @@
             <a:p>
               <a:pPr algn="l" marL="0" marR="0" indent="0">
                 <a:lnSpc>
-                  <a:spcPts val="1200"/>
+                  <a:spcPts val="1000"/>
                 </a:lnSpc>
                 <a:spcBef>
                   <a:spcPts val="0"/>
@@ -5605,7 +5624,7 @@
                 </a:spcAft>
               </a:pPr>
               <a:r>
-                <a:rPr sz="1200">
+                <a:rPr sz="1000">
                   <a:solidFill>
                     <a:srgbClr val="404040">
                       <a:alpha val="100000"/>
@@ -5614,14 +5633,14 @@
                   <a:latin typeface="Helvetica"/>
                   <a:cs typeface="Helvetica"/>
                 </a:rPr>
-                <a:t>subHR = 0.75 (95% CI 0.49-1.14), p = 0.180   (per 0.1-unit increase in eGFR difference)</a:t>
+                <a:t>subHR = 1.33 (95% CI 0.88-2.03), p = 0.180   (per 10% decrease)</a:t>
               </a:r>
             </a:p>
           </p:txBody>
         </p:sp>
         <p:sp>
           <p:nvSpPr>
-            <p:cNvPr id="51" name="tx51"/>
+            <p:cNvPr id="52" name="tx52"/>
             <p:cNvSpPr/>
             <p:nvPr/>
           </p:nvSpPr>
